--- a/Curso Gas B/17 - Gas a la primera (guia practica NEDGIA)/17 - Gas a la primera (guia practica NEDGIA) - Vídeo 2.pptx
+++ b/Curso Gas B/17 - Gas a la primera (guia practica NEDGIA)/17 - Gas a la primera (guia practica NEDGIA) - Vídeo 2.pptx
@@ -21,6 +21,7 @@
     <p:sldId id="269" r:id="rId21"/>
     <p:sldId id="270" r:id="rId22"/>
     <p:sldId id="271" r:id="rId23"/>
+    <p:sldId id="272" r:id="rId24"/>
   </p:sldIdLst>
   <p:sldSz cx="12191695" cy="6858000" type="screen4x3"/>
   <p:notesSz cx="6858000" cy="9144000"/>
@@ -592,12 +593,12 @@
           <a:lstStyle/>
           <a:p>
             <a:r>
-              <a:t>N1: ¿Para qué sirve el limitador de temperatura de la cocina si va con multicapa?</a:t>
-            </a:r>
-          </a:p>
-          <a:p>
-            <a:r>
-              <a:t>N2: Grábate estos dos números en pareja, porque van juntos en la llave de la cocina cuando la instalación es de multicapa: caudal de un metro cúbico con seis por hora y temperatura de noventa y seis grados. El de caudal evita que se dispare el consumo si hay una rotura. Y el de temperatura es una seguridad extra pensada para el plástico: si el multicapa se calienta demasiado, por ejemplo por un conato de incendio cerca, el limitador corta el gas antes de que el plástico llegue a fallar. Un tubo metálico aguanta el calor; el multicapa no tanto, y por eso lleva ese seguro. Añade dos datos: cada instalación individual lleva su limitador de caudal, siempre montado por fuera de la vivienda, y el corrugado inoxidable no puede pasar de medio bar y va con uniones roscadas. No lo mandes a más presión.</a:t>
+              <a:t>N1: ¿Cómo sé si un multicapa es apto para ir por fuera?</a:t>
+            </a:r>
+          </a:p>
+          <a:p>
+            <a:r>
+              <a:t>N2: Por el color y por su resistencia. El multicapa de exterior tiene que aguantar los rayos ultravioleta del sol, porque si no, el plástico se degrada; lo normal es que sea negro con tres líneas amarillas a lo largo, que es la señal de que es gas, aunque también hay amarillo homologado para fuera. El de interior suele ser amarillo. Los dos se pueden pintar, por ejemplo para que peguen con la fachada, pero solo con pinturas acrílicas sin disolventes, porque los disolventes atacan el plástico; y si lo pintas, tienes que dejar marcas claras y permanentes de que ese tubo es de gas, los llamados testigos de gas, para que nadie lo confunda con otra instalación. Los accesorios, además, van marcados con una señal amarilla. Todo esto es para que, dentro de muchos años, quien abra la pared sepa a la primera que eso lleva gas.</a:t>
             </a:r>
           </a:p>
         </p:txBody>
@@ -667,12 +668,12 @@
           <a:lstStyle/>
           <a:p>
             <a:r>
-              <a:t>N1: ¿Todas las vainas hacen lo mismo?</a:t>
-            </a:r>
-          </a:p>
-          <a:p>
-            <a:r>
-              <a:t>N2: No, y esta es de las que más se confunden. Una vaina puede estar por dos motivos muy distintos. El primero es protección mecánica: que nadie le pegue un golpe al tubo. Por eso se protege en zonas de paso o estacionamiento de vehículos, en garajes, y en la vía pública hasta un metro con ochenta de altura, que es hasta donde llega la gente y los golpes. El segundo motivo es ventilación: que si hay una fuga, el gas no se quede escondido. Por eso se envaina y se ventila en falsos techos, altillos, huecos de la edificación y locales a los que no suministra ese gas. Fíjate que no es lo mismo blindar el tubo que airearlo. Y en ambos casos, dos requisitos: la vaina debe ser continua en todo su recorrido y no puede llevar dentro ningún órgano de maniobra, ninguna llave.</a:t>
+              <a:t>N1: ¿Para qué sirve el limitador de temperatura de la cocina si va con multicapa?</a:t>
+            </a:r>
+          </a:p>
+          <a:p>
+            <a:r>
+              <a:t>N2: Grábate estos dos números en pareja, porque van juntos en la llave de la cocina cuando la instalación es de multicapa: caudal de un metro cúbico con seis por hora y temperatura de noventa y seis grados. El de caudal evita que se dispare el consumo si hay una rotura. Y el de temperatura es una seguridad extra pensada para el plástico: si el multicapa se calienta demasiado, por ejemplo por un conato de incendio cerca, el limitador corta el gas antes de que el plástico llegue a fallar. Un tubo metálico aguanta el calor; el multicapa no tanto, y por eso lleva ese seguro. Añade dos datos: cada instalación individual lleva su limitador de caudal, siempre montado por fuera de la vivienda, y el corrugado inoxidable no puede pasar de medio bar y va con uniones roscadas. No lo mandes a más presión.</a:t>
             </a:r>
           </a:p>
         </p:txBody>
@@ -742,12 +743,12 @@
           <a:lstStyle/>
           <a:p>
             <a:r>
-              <a:t>N1: ¿Qué espesores hay que recordar de las vainas y conductos?</a:t>
-            </a:r>
-          </a:p>
-          <a:p>
-            <a:r>
-              <a:t>N2: Dos espesores que caen fijo. Cuando el conducto es de obra, o sea de albañilería, el espesor mínimo son cinco centímetros. Cuando el conducto es de acero, el mínimo es un milímetro y medio. Y hay una condición extra en los casos delicados, que son los sótanos y la ventilación: ahí el material tiene que garantizar la estanqueidad, porque no quieres que el gas se escape del conducto al recinto que atraviesa. Un par de detalles finos: si la vaina es metálica, no puede estar en contacto ni con las estructuras metálicas del edificio ni con otras tuberías, para que no se genere corrosión por contacto, y tiene que ser compatible con el material del tubo. Y cuando su función es ventilar, la vaina tiene que respirar por sus dos extremos al exterior; si solo respira por uno, el otro va sellado al propio tubo, para que el gas solo pueda salir por la boca buena.</a:t>
+              <a:t>N1: ¿Todas las vainas hacen lo mismo?</a:t>
+            </a:r>
+          </a:p>
+          <a:p>
+            <a:r>
+              <a:t>N2: No, y esta es de las que más se confunden. Una vaina puede estar por dos motivos muy distintos. El primero es protección mecánica: que nadie le pegue un golpe al tubo. Por eso se protege en zonas de paso o estacionamiento de vehículos, en garajes, y en la vía pública hasta un metro con ochenta de altura, que es hasta donde llega la gente y los golpes. El segundo motivo es ventilación: que si hay una fuga, el gas no se quede escondido. Por eso se envaina y se ventila en falsos techos, altillos, huecos de la edificación y locales a los que no suministra ese gas. Fíjate que no es lo mismo blindar el tubo que airearlo. Y en ambos casos, dos requisitos: la vaina debe ser continua en todo su recorrido y no puede llevar dentro ningún órgano de maniobra, ninguna llave.</a:t>
             </a:r>
           </a:p>
         </p:txBody>
@@ -817,12 +818,12 @@
           <a:lstStyle/>
           <a:p>
             <a:r>
-              <a:t>N1: ¿Por qué es tan importante la prueba de estanqueidad?</a:t>
-            </a:r>
-          </a:p>
-          <a:p>
-            <a:r>
-              <a:t>N2: Porque es el examen final del tubo antes de meterle gas. Toda instalación nueva se somete a una prueba de estanqueidad con resultado satisfactorio, siguiendo la parte ocho de la norma UNE sesenta mil seiscientos setenta, y se hace antes de la puesta en servicio, no después. La idea es sencilla: metes presión en la instalación y compruebas que no pierde ni una burbuja durante un tiempo. Estanqueidad, precisamente, quiere decir eso: que no se escapa nada. Un detalle práctico: no se prueban ni los conjuntos de regulación ni los contadores, porque son aparatos que la presión de prueba podría dañar; se prueba el tubo. Y el resultado de esta prueba es justo lo que respalda el certificado de instalación que luego firmas y entregas a la distribuidora para que te den el gas. Sin prueba satisfactoria, no hay puesta en servicio.</a:t>
+              <a:t>N1: ¿Qué espesores hay que recordar de las vainas y conductos?</a:t>
+            </a:r>
+          </a:p>
+          <a:p>
+            <a:r>
+              <a:t>N2: Dos espesores que caen fijo. Cuando el conducto es de obra, o sea de albañilería, el espesor mínimo son cinco centímetros. Cuando el conducto es de acero, el mínimo es un milímetro y medio. Y hay una condición extra en los casos delicados, que son los sótanos y la ventilación: ahí el material tiene que garantizar la estanqueidad, porque no quieres que el gas se escape del conducto al recinto que atraviesa. Un par de detalles finos: si la vaina es metálica, no puede estar en contacto ni con las estructuras metálicas del edificio ni con otras tuberías, para que no se genere corrosión por contacto, y tiene que ser compatible con el material del tubo. Y cuando su función es ventilar, la vaina tiene que respirar por sus dos extremos al exterior; si solo respira por uno, el otro va sellado al propio tubo, para que el gas solo pueda salir por la boca buena.</a:t>
             </a:r>
           </a:p>
         </p:txBody>
@@ -892,12 +893,12 @@
           <a:lstStyle/>
           <a:p>
             <a:r>
-              <a:t>N1: ¿De qué depende el tiempo que hay que mantener la prueba?</a:t>
-            </a:r>
-          </a:p>
-          <a:p>
-            <a:r>
-              <a:t>N2: Depende de la presión de la instalación y de su tamaño. Quédate primero con la escalera de tiempos base, de más a menos presión: de dos a cinco bar, sesenta minutos; de cuatro décimas a dos bar, treinta minutos; de cinco centésimas a cuatro décimas, treinta minutos; y baja presión, hasta cinco centésimas, quince minutos. Sobre esa base hay recortes cuando el tramo es corto: una instalación individual de menos de veinte metros baja a treinta minutos en alta; menos de quince metros, quince minutos; menos de diez metros, diez minutos. Y al revés: cuando la instalación es grande, de mucho caudal, la prueba se dispara a seis horas o veinticuatro horas, y entonces hay que registrar la presión y la temperatura, porque el propio calor cambia la presión y hay que descontarlo. Más presión y más tamaño, más tiempo de prueba.</a:t>
+              <a:t>N1: ¿Por qué es tan importante la prueba de estanqueidad?</a:t>
+            </a:r>
+          </a:p>
+          <a:p>
+            <a:r>
+              <a:t>N2: Porque es el examen final del tubo antes de meterle gas. Toda instalación nueva se somete a una prueba de estanqueidad con resultado satisfactorio, siguiendo la parte ocho de la norma UNE sesenta mil seiscientos setenta, y se hace antes de la puesta en servicio, no después. La idea es sencilla: metes presión en la instalación y compruebas que no pierde ni una burbuja durante un tiempo. Estanqueidad, precisamente, quiere decir eso: que no se escapa nada. Un detalle práctico: no se prueban ni los conjuntos de regulación ni los contadores, porque son aparatos que la presión de prueba podría dañar; se prueba el tubo. Y el resultado de esta prueba es justo lo que respalda el certificado de instalación que luego firmas y entregas a la distribuidora para que te den el gas. Sin prueba satisfactoria, no hay puesta en servicio.</a:t>
             </a:r>
           </a:p>
         </p:txBody>
@@ -967,12 +968,12 @@
           <a:lstStyle/>
           <a:p>
             <a:r>
-              <a:t>N1: ¿Puedo usar cualquier manómetro para la prueba?</a:t>
-            </a:r>
-          </a:p>
-          <a:p>
-            <a:r>
-              <a:t>N2: No, el manómetro se elige según la presión que vas a medir, no a ojo. Dos ideas prácticas. Primera: la aguja debe trabajar entre el treinta y cinco y el setenta y cinco por ciento de la escala; ni pegada al cero ni al tope, porque en los extremos el manómetro miente. Y a más presión, esfera más grande y clase más fina, que quiere decir más preciso. En baja presión de verdad, el rey sigue siendo la columna de agua en forma de U: es barata, fiable y no tiene trampa. Segunda idea, muy importante: si en el tramo hay aparatos delicados, como electroválvulas, cartuchos de filtro o manómetros finos, la presión de prueba, que es alta, los puede reventar. Así que se desmontan, se prueba el tubo desnudo, y luego se vuelven a montar y se comprueba la estanqueidad a la presión de trabajo, la MOP, no a la de prueba. El tubo se prueba fuerte; los aparatos delicados, a su presión. Y siempre, además, se mira cada soldadura: tiene que verse el material de aportación y las roscas bien apretadas.</a:t>
+              <a:t>N1: ¿De qué depende el tiempo que hay que mantener la prueba?</a:t>
+            </a:r>
+          </a:p>
+          <a:p>
+            <a:r>
+              <a:t>N2: Depende de la presión de la instalación y de su tamaño. Quédate primero con la escalera de tiempos base, de más a menos presión: de dos a cinco bar, sesenta minutos; de cuatro décimas a dos bar, treinta minutos; de cinco centésimas a cuatro décimas, treinta minutos; y baja presión, hasta cinco centésimas, quince minutos. Sobre esa base hay recortes cuando el tramo es corto: una instalación individual de menos de veinte metros baja a treinta minutos en alta; menos de quince metros, quince minutos; menos de diez metros, diez minutos. Y al revés: cuando la instalación es grande, de mucho caudal, la prueba se dispara a seis horas o veinticuatro horas, y entonces hay que registrar la presión y la temperatura, porque el propio calor cambia la presión y hay que descontarlo. Más presión y más tamaño, más tiempo de prueba.</a:t>
             </a:r>
           </a:p>
         </p:txBody>
@@ -1042,6 +1043,81 @@
           <a:lstStyle/>
           <a:p>
             <a:r>
+              <a:t>N1: ¿Puedo usar cualquier manómetro para la prueba?</a:t>
+            </a:r>
+          </a:p>
+          <a:p>
+            <a:r>
+              <a:t>N2: No, el manómetro se elige según la presión que vas a medir, no a ojo. Dos ideas prácticas. Primera: la aguja debe trabajar entre el treinta y cinco y el setenta y cinco por ciento de la escala; ni pegada al cero ni al tope, porque en los extremos el manómetro miente. Y a más presión, esfera más grande y clase más fina, que quiere decir más preciso. En baja presión de verdad, el rey sigue siendo la columna de agua en forma de U: es barata, fiable y no tiene trampa. Segunda idea, muy importante: si en el tramo hay aparatos delicados, como electroválvulas, cartuchos de filtro o manómetros finos, la presión de prueba, que es alta, los puede reventar. Así que se desmontan, se prueba el tubo desnudo, y luego se vuelven a montar y se comprueba la estanqueidad a la presión de trabajo, la MOP, no a la de prueba. El tubo se prueba fuerte; los aparatos delicados, a su presión. Y siempre, además, se mira cada soldadura: tiene que verse el material de aportación y las roscas bien apretadas.</a:t>
+            </a:r>
+          </a:p>
+        </p:txBody>
+      </p:sp>
+      <p:sp>
+        <p:nvSpPr>
+          <p:cNvPr id="4" name="Slide Number Placeholder 3"/>
+          <p:cNvSpPr>
+            <a:spLocks noGrp="1"/>
+          </p:cNvSpPr>
+          <p:nvPr>
+            <p:ph type="sldNum" idx="5" sz="quarter"/>
+          </p:nvPr>
+        </p:nvSpPr>
+        <p:spPr/>
+      </p:sp>
+    </p:spTree>
+  </p:cSld>
+  <p:clrMapOvr>
+    <a:masterClrMapping/>
+  </p:clrMapOvr>
+</p:notes>
+</file>
+
+<file path=ppt/notesSlides/notesSlide17.xml><?xml version="1.0" encoding="utf-8"?>
+<p:notes xmlns:a="http://schemas.openxmlformats.org/drawingml/2006/main" xmlns:p="http://schemas.openxmlformats.org/presentationml/2006/main" xmlns:r="http://schemas.openxmlformats.org/officeDocument/2006/relationships">
+  <p:cSld>
+    <p:spTree>
+      <p:nvGrpSpPr>
+        <p:cNvPr id="1" name=""/>
+        <p:cNvGrpSpPr/>
+        <p:nvPr/>
+      </p:nvGrpSpPr>
+      <p:grpSpPr>
+        <a:xfrm>
+          <a:off x="0" y="0"/>
+          <a:ext cx="0" cy="0"/>
+          <a:chOff x="0" y="0"/>
+          <a:chExt cx="0" cy="0"/>
+        </a:xfrm>
+      </p:grpSpPr>
+      <p:sp>
+        <p:nvSpPr>
+          <p:cNvPr id="2" name="Slide Image Placeholder 1"/>
+          <p:cNvSpPr>
+            <a:spLocks noGrp="1"/>
+          </p:cNvSpPr>
+          <p:nvPr>
+            <p:ph type="sldImg" idx="2"/>
+          </p:nvPr>
+        </p:nvSpPr>
+        <p:spPr/>
+      </p:sp>
+      <p:sp>
+        <p:nvSpPr>
+          <p:cNvPr id="3" name="Notes Placeholder 2"/>
+          <p:cNvSpPr>
+            <a:spLocks noGrp="1"/>
+          </p:cNvSpPr>
+          <p:nvPr>
+            <p:ph type="body" idx="3" sz="quarter"/>
+          </p:nvPr>
+        </p:nvSpPr>
+        <p:spPr/>
+        <p:txBody>
+          <a:bodyPr/>
+          <a:lstStyle/>
+          <a:p>
+            <a:r>
               <a:t>N1: Ha sido denso. ¿Cómo lo ato todo para que no se me escape?</a:t>
             </a:r>
           </a:p>
@@ -1190,16 +1266,7 @@
         <p:txBody>
           <a:bodyPr/>
           <a:lstStyle/>
-          <a:p>
-            <a:r>
-              <a:t>N1: ¿Por qué hay que separar el tubo de gas tres centímetros de todo lo demás?</a:t>
-            </a:r>
-          </a:p>
-          <a:p>
-            <a:r>
-              <a:t>N2: Vamos a por la chuleta y luego el porqué. La chuleta es fácil: tres centímetros de separación entre la tubería de gas y las conducciones de agua, de electricidad, de vapor, las chimeneas y el suelo, y da igual que vayan en paralelo o que se crucen. La única casilla que no aplica es el suelo en cruce, porque un tubo no cruza el suelo. ¿Y el porqué? Si pegas el tubo de gas a una eléctrica, tienes un cable calentándose al lado del gas; si lo pegas a una tubería de agua caliente o de vapor, tienes humedad y calor, que es corrosión asegurada. Corrosión y punto caliente terminan en fuga, y encima en un sitio donde no vas a mirar. Respetarlo es baratísimo al montar; repararlo luego es carísimo. Y si en un rincón no llegas, no lo dejes pegado: protege el tubo según la norma.</a:t>
-            </a:r>
-          </a:p>
+          <a:p/>
         </p:txBody>
       </p:sp>
       <p:sp>
@@ -1267,12 +1334,12 @@
           <a:lstStyle/>
           <a:p>
             <a:r>
-              <a:t>N1: La lista de sitios prohibidos es larga. ¿Hay una idea que los una a todos?</a:t>
-            </a:r>
-          </a:p>
-          <a:p>
-            <a:r>
-              <a:t>N2: Sí, y si la pillas no necesitas memorizar la lista entera. La idea es esta: no metas gas donde ya hay un riesgo o un camino hecho para el fuego y el humo. Un hueco de ascensor comunica plantas de golpe; un bajante de basuras y una chimenea son conductos por los que sube todo; un cuarto de transformadores tiene arcos eléctricos; un local con combustibles líquidos ya es peligroso de por sí. En todos esos sitios, una fuga pequeña se convierte en un problema gordo que se propaga. Tampoco por los forjados que son suelo de vivienda. La única excepción práctica es la boca de ventilación: por ahí puedes aprovechar el hueco si el tubo va envainado y sigue quedando libre la superficie mínima que la norma pide para ventilar. Colar el tubo por uno de estos sitios porque venía de paso es rechazo directo en la puesta en servicio.</a:t>
+              <a:t>N1: ¿Por qué hay que separar el tubo de gas tres centímetros de todo lo demás?</a:t>
+            </a:r>
+          </a:p>
+          <a:p>
+            <a:r>
+              <a:t>N2: Vamos a por la chuleta y luego el porqué. La chuleta es fácil: tres centímetros de separación entre la tubería de gas y las conducciones de agua, de electricidad, de vapor, las chimeneas y el suelo, y da igual que vayan en paralelo o que se crucen. La única casilla que no aplica es el suelo en cruce, porque un tubo no cruza el suelo. ¿Y el porqué? Si pegas el tubo de gas a una eléctrica, tienes un cable calentándose al lado del gas; si lo pegas a una tubería de agua caliente o de vapor, tienes humedad y calor, que es corrosión asegurada. Corrosión y punto caliente terminan en fuga, y encima en un sitio donde no vas a mirar. Respetarlo es baratísimo al montar; repararlo luego es carísimo. Y si en un rincón no llegas, no lo dejes pegado: protege el tubo según la norma.</a:t>
             </a:r>
           </a:p>
         </p:txBody>
@@ -1342,12 +1409,12 @@
           <a:lstStyle/>
           <a:p>
             <a:r>
-              <a:t>N1: ¿Cuándo uso soldadura blanda y cuándo fuerte?</a:t>
-            </a:r>
-          </a:p>
-          <a:p>
-            <a:r>
-              <a:t>N2: Regla de bolsillo: la frontera es la presión. Hasta cinco centésimas de bar, que es baja presión, vale soldadura blanda. Por encima de esa cifra, soldadura fuerte. ¿Por qué? Porque la soldadura fuerte aguanta más temperatura y da más garantía mecánica; a más presión, más te juegas en cada unión. Y hay dos escenarios serios donde pides fuerte aunque sea baja presión: los aparcamientos cerrados, donde una fuga se acumula con coches y arranques, y las cocinas con aparatos de cocción tipo A cuya suma pase de treinta kilovatios, que mueven mucho gas. En esos dos sitios, fuerte siempre. Piénsalo así: cuando el escenario es más peligroso, subes el nivel de la unión, aunque la presión sea baja.</a:t>
+              <a:t>N1: La lista de sitios prohibidos es larga. ¿Hay una idea que los una a todos?</a:t>
+            </a:r>
+          </a:p>
+          <a:p>
+            <a:r>
+              <a:t>N2: Sí, y si la pillas no necesitas memorizar la lista entera. La idea es esta: no metas gas donde ya hay un riesgo o un camino hecho para el fuego y el humo. Un hueco de ascensor comunica plantas de golpe; un bajante de basuras y una chimenea son conductos por los que sube todo; un cuarto de transformadores tiene arcos eléctricos; un local con combustibles líquidos ya es peligroso de por sí. En todos esos sitios, una fuga pequeña se convierte en un problema gordo que se propaga. Tampoco por los forjados que son suelo de vivienda. La única excepción práctica es la boca de ventilación: por ahí puedes aprovechar el hueco si el tubo va envainado y sigue quedando libre la superficie mínima que la norma pide para ventilar. Colar el tubo por uno de estos sitios porque venía de paso es rechazo directo en la puesta en servicio.</a:t>
             </a:r>
           </a:p>
         </p:txBody>
@@ -1417,12 +1484,12 @@
           <a:lstStyle/>
           <a:p>
             <a:r>
-              <a:t>N1: ¿Me tengo que aprender de memoria las quince normas de la tabla?</a:t>
-            </a:r>
-          </a:p>
-          <a:p>
-            <a:r>
-              <a:t>N2: Tranquilo, nadie te pide recitar quince normas con su número exacto. Lo que sí tienes que reconocer son las de siempre, las que aparecen una y otra vez. El cobre va con la UNE E-N mil cincuenta y siete. El multicapa, con la UNE cincuenta y tres mil ocho. El corrugado inoxidable hasta medio bar, con la UNE E-N quince mil doscientos sesenta y seis. Las llaves pequeñas, de diámetro menor de cincuenta, con la UNE E-N trescientos treinta y uno. El centralizador de contadores, con la UNE sesenta mil cuatrocientos noventa. Y el polietileno, con la UNE E-N mil quinientos cincuenta y cinco. Fíjate en un detalle que cae: las citamos sin año. Así lo manda el Reglamento; el listado completo con los años concretos vive en una instrucción técnica aparte. Lo importante no es empollar, es saber que cada material tiene su norma y dónde buscarla.</a:t>
+              <a:t>N1: ¿Cuándo uso soldadura blanda y cuándo fuerte?</a:t>
+            </a:r>
+          </a:p>
+          <a:p>
+            <a:r>
+              <a:t>N2: Regla de bolsillo: la frontera es la presión. Hasta cinco centésimas de bar, que es baja presión, vale soldadura blanda. Por encima de esa cifra, soldadura fuerte. ¿Por qué? Porque la soldadura fuerte aguanta más temperatura y da más garantía mecánica; a más presión, más te juegas en cada unión. Y hay dos escenarios serios donde pides fuerte aunque sea baja presión: los aparcamientos cerrados, donde una fuga se acumula con coches y arranques, y las cocinas con aparatos de cocción tipo A cuya suma pase de treinta kilovatios, que mueven mucho gas. En esos dos sitios, fuerte siempre. Piénsalo así: cuando el escenario es más peligroso, subes el nivel de la unión, aunque la presión sea baja.</a:t>
             </a:r>
           </a:p>
         </p:txBody>
@@ -1492,12 +1559,12 @@
           <a:lstStyle/>
           <a:p>
             <a:r>
-              <a:t>N1: ¿Qué diferencia hay entre cobre recocido y cobre duro?</a:t>
-            </a:r>
-          </a:p>
-          <a:p>
-            <a:r>
-              <a:t>N2: Es una diferencia muy práctica que se nota en cuanto los coges. El cobre recocido viene blando y en rollo: lo doblas a mano, así que es ideal para tuberías vistas, empotradas o incluso enterradas, y en enterrado le pides milímetro y medio de espesor como mínimo. El cobre duro viene en barra rígida y no se dobla a mano; se une por soldadura o por press-fitting. ¿Y cómo se hacen los codos sin estropear el tubo? La regla de oro: se curva en frío, con una máquina o un muelle, pero sin aplastar el tubo. Si al doblar deformas el radio de curvatura y el tubo se ovala, le has reducido la sección por dentro y ya no vale, porque estrangulas el paso del gas. Doblar sí, aplastar no.</a:t>
+              <a:t>N1: ¿Me tengo que aprender de memoria las quince normas de la tabla?</a:t>
+            </a:r>
+          </a:p>
+          <a:p>
+            <a:r>
+              <a:t>N2: Tranquilo, nadie te pide recitar quince normas con su número exacto. Lo que sí tienes que reconocer son las de siempre, las que aparecen una y otra vez. El cobre va con la UNE E-N mil cincuenta y siete. El multicapa, con la UNE cincuenta y tres mil ocho. El corrugado inoxidable hasta medio bar, con la UNE E-N quince mil doscientos sesenta y seis. Las llaves pequeñas, de diámetro menor de cincuenta, con la UNE E-N trescientos treinta y uno. El centralizador de contadores, con la UNE sesenta mil cuatrocientos noventa. Y el polietileno, con la UNE E-N mil quinientos cincuenta y cinco. Fíjate en un detalle que cae: las citamos sin año. Así lo manda el Reglamento; el listado completo con los años concretos vive en una instrucción técnica aparte. Lo importante no es empollar, es saber que cada material tiene su norma y dónde buscarla.</a:t>
             </a:r>
           </a:p>
         </p:txBody>
@@ -1567,12 +1634,12 @@
           <a:lstStyle/>
           <a:p>
             <a:r>
-              <a:t>N1: Si uno un tubo de acero inoxidable con uno de cobre, ¿pasa algo?</a:t>
-            </a:r>
-          </a:p>
-          <a:p>
-            <a:r>
-              <a:t>N2: Puede pasar, y por eso hay una regla. Cuando juntas dos metales distintos y hay algo de humedad, se genera corrosión galvánica: es como una pila diminuta que se va comiendo la unión con el tiempo hasta que gotea gas. Para evitarlo, la unión de inoxidable con cobre se hace con un manguito de cuproníquel, que hace de árbitro entre los dos metales. La regla es sencilla: iguales con su mismo metal, inox con inox y cobre con cobre; y distintos, inox con cobre, con manguito de cuproníquel. Además, para unir por press-fitting los tubos deben tener el mismo diámetro exterior, pared mínima de un milímetro, y el inoxidable tiene que ser de la serie dos, que es la homologada para gas. Y algo muy útil: el press-fitting vale dentro y fuera hasta cinco bar, y sustituye a la soldadura fuerte por capilaridad.</a:t>
+              <a:t>N1: ¿Qué diferencia hay entre cobre recocido y cobre duro?</a:t>
+            </a:r>
+          </a:p>
+          <a:p>
+            <a:r>
+              <a:t>N2: Es una diferencia muy práctica que se nota en cuanto los coges. El cobre recocido viene blando y en rollo: lo doblas a mano, así que es ideal para tuberías vistas, empotradas o incluso enterradas, y en enterrado le pides milímetro y medio de espesor como mínimo. El cobre duro viene en barra rígida y no se dobla a mano; se une por soldadura o por press-fitting. ¿Y cómo se hacen los codos sin estropear el tubo? La regla de oro: se curva en frío, con una máquina o un muelle, pero sin aplastar el tubo. Si al doblar deformas el radio de curvatura y el tubo se ovala, le has reducido la sección por dentro y ya no vale, porque estrangulas el paso del gas. Doblar sí, aplastar no.</a:t>
             </a:r>
           </a:p>
         </p:txBody>
@@ -1642,12 +1709,12 @@
           <a:lstStyle/>
           <a:p>
             <a:r>
-              <a:t>N1: ¿Cómo sé si un multicapa es apto para ir por fuera?</a:t>
-            </a:r>
-          </a:p>
-          <a:p>
-            <a:r>
-              <a:t>N2: Por el color y por su resistencia. El multicapa de exterior tiene que aguantar los rayos ultravioleta del sol, porque si no, el plástico se degrada; lo normal es que sea negro con tres líneas amarillas a lo largo, que es la señal de que es gas, aunque también hay amarillo homologado para fuera. El de interior suele ser amarillo. Los dos se pueden pintar, por ejemplo para que peguen con la fachada, pero solo con pinturas acrílicas sin disolventes, porque los disolventes atacan el plástico; y si lo pintas, tienes que dejar marcas claras y permanentes de que ese tubo es de gas, los llamados testigos de gas, para que nadie lo confunda con otra instalación. Los accesorios, además, van marcados con una señal amarilla. Todo esto es para que, dentro de muchos años, quien abra la pared sepa a la primera que eso lleva gas.</a:t>
+              <a:t>N1: Si uno un tubo de acero inoxidable con uno de cobre, ¿pasa algo?</a:t>
+            </a:r>
+          </a:p>
+          <a:p>
+            <a:r>
+              <a:t>N2: Puede pasar, y por eso hay una regla. Cuando juntas dos metales distintos y hay algo de humedad, se genera corrosión galvánica: es como una pila diminuta que se va comiendo la unión con el tiempo hasta que gotea gas. Para evitarlo, la unión de inoxidable con cobre se hace con un manguito de cuproníquel, que hace de árbitro entre los dos metales. La regla es sencilla: iguales con su mismo metal, inox con inox y cobre con cobre; y distintos, inox con cobre, con manguito de cuproníquel. Además, para unir por press-fitting los tubos deben tener el mismo diámetro exterior, pared mínima de un milímetro, y el inoxidable tiene que ser de la serie dos, que es la homologada para gas. Y algo muy útil: el press-fitting vale dentro y fuera hasta cinco bar, y sustituye a la soldadura fuerte por capilaridad.</a:t>
             </a:r>
           </a:p>
         </p:txBody>
@@ -4722,7 +4789,7 @@
             <a:r>
               <a:rPr sz="1400" b="1" i="0">
                 <a:solidFill>
-                  <a:srgbClr val="CADCFC"/>
+                  <a:srgbClr val="F4A24C"/>
                 </a:solidFill>
                 <a:latin typeface="Montserrat"/>
               </a:rPr>
@@ -4733,13 +4800,57 @@
       </p:sp>
       <p:sp>
         <p:nvSpPr>
-          <p:cNvPr id="4" name="TextBox 3"/>
+          <p:cNvPr id="4" name="Rounded Rectangle 3"/>
+          <p:cNvSpPr/>
+          <p:nvPr/>
+        </p:nvSpPr>
+        <p:spPr>
+          <a:xfrm>
+            <a:off x="868680" y="2057400"/>
+            <a:ext cx="1463040" cy="82296"/>
+          </a:xfrm>
+          <a:prstGeom prst="roundRect">
+            <a:avLst/>
+          </a:prstGeom>
+          <a:solidFill>
+            <a:srgbClr val="E8801A"/>
+          </a:solidFill>
+          <a:ln>
+            <a:noFill/>
+          </a:ln>
+          <a:effectLst/>
+        </p:spPr>
+        <p:style>
+          <a:lnRef idx="1">
+            <a:schemeClr val="accent1"/>
+          </a:lnRef>
+          <a:fillRef idx="3">
+            <a:schemeClr val="accent1"/>
+          </a:fillRef>
+          <a:effectRef idx="2">
+            <a:schemeClr val="accent1"/>
+          </a:effectRef>
+          <a:fontRef idx="minor">
+            <a:schemeClr val="lt1"/>
+          </a:fontRef>
+        </p:style>
+        <p:txBody>
+          <a:bodyPr rtlCol="0" anchor="ctr"/>
+          <a:lstStyle/>
+          <a:p>
+            <a:pPr algn="ctr"/>
+          </a:p>
+        </p:txBody>
+      </p:sp>
+      <p:sp>
+        <p:nvSpPr>
+          <p:cNvPr id="5" name="TextBox 4"/>
           <p:cNvSpPr txBox="1"/>
           <p:nvPr/>
         </p:nvSpPr>
         <p:spPr>
           <a:xfrm>
-            <a:off x="822960" y="2194560"/>
+            <a:off x="822960" y="2286000"/>
             <a:ext cx="10515600" cy="2011680"/>
           </a:xfrm>
           <a:prstGeom prst="rect">
@@ -4778,7 +4889,7 @@
       </p:sp>
       <p:sp>
         <p:nvSpPr>
-          <p:cNvPr id="5" name="TextBox 4"/>
+          <p:cNvPr id="6" name="TextBox 5"/>
           <p:cNvSpPr txBox="1"/>
           <p:nvPr/>
         </p:nvSpPr>
@@ -4902,7 +5013,7 @@
                 </a:solidFill>
                 <a:latin typeface="Montserrat"/>
               </a:rPr>
-              <a:t>010 / 016</a:t>
+              <a:t>010 / 017</a:t>
             </a:r>
           </a:p>
         </p:txBody>
@@ -4950,7 +5061,7 @@
         <p:spPr>
           <a:xfrm>
             <a:off x="822960" y="457200"/>
-            <a:ext cx="8229600" cy="365760"/>
+            <a:ext cx="10058400" cy="365760"/>
           </a:xfrm>
           <a:prstGeom prst="rect">
             <a:avLst/>
@@ -4964,13 +5075,13 @@
           <a:lstStyle/>
           <a:p>
             <a:r>
-              <a:rPr sz="1200" b="1" i="0">
-                <a:solidFill>
-                  <a:srgbClr val="64748B"/>
-                </a:solidFill>
-                <a:latin typeface="Montserrat"/>
-              </a:rPr>
-              <a:t>LIMITADORES</a:t>
+              <a:rPr sz="1300" b="1" i="0">
+                <a:solidFill>
+                  <a:srgbClr val="E8801A"/>
+                </a:solidFill>
+                <a:latin typeface="Montserrat"/>
+              </a:rPr>
+              <a:t>TUBO MULTICAPA</a:t>
             </a:r>
           </a:p>
         </p:txBody>
@@ -4998,26 +5109,70 @@
           <a:lstStyle/>
           <a:p>
             <a:r>
-              <a:rPr sz="2700" b="1" i="0">
+              <a:rPr sz="2800" b="1" i="0">
                 <a:solidFill>
                   <a:srgbClr val="1E2761"/>
                 </a:solidFill>
                 <a:latin typeface="Montserrat"/>
               </a:rPr>
-              <a:t>Cocina de multicapa: caudal y temperatura</a:t>
-            </a:r>
-          </a:p>
-        </p:txBody>
-      </p:sp>
-      <p:sp>
-        <p:nvSpPr>
-          <p:cNvPr id="7" name="TextBox 6"/>
+              <a:t>Multicapa: colores que identifican el gas</a:t>
+            </a:r>
+          </a:p>
+        </p:txBody>
+      </p:sp>
+      <p:sp>
+        <p:nvSpPr>
+          <p:cNvPr id="7" name="Rounded Rectangle 6"/>
+          <p:cNvSpPr/>
+          <p:nvPr/>
+        </p:nvSpPr>
+        <p:spPr>
+          <a:xfrm>
+            <a:off x="868680" y="1627632"/>
+            <a:ext cx="2011680" cy="73152"/>
+          </a:xfrm>
+          <a:prstGeom prst="roundRect">
+            <a:avLst/>
+          </a:prstGeom>
+          <a:solidFill>
+            <a:srgbClr val="E8801A"/>
+          </a:solidFill>
+          <a:ln>
+            <a:noFill/>
+          </a:ln>
+          <a:effectLst/>
+        </p:spPr>
+        <p:style>
+          <a:lnRef idx="1">
+            <a:schemeClr val="accent1"/>
+          </a:lnRef>
+          <a:fillRef idx="3">
+            <a:schemeClr val="accent1"/>
+          </a:fillRef>
+          <a:effectRef idx="2">
+            <a:schemeClr val="accent1"/>
+          </a:effectRef>
+          <a:fontRef idx="minor">
+            <a:schemeClr val="lt1"/>
+          </a:fontRef>
+        </p:style>
+        <p:txBody>
+          <a:bodyPr rtlCol="0" anchor="ctr"/>
+          <a:lstStyle/>
+          <a:p>
+            <a:pPr algn="ctr"/>
+          </a:p>
+        </p:txBody>
+      </p:sp>
+      <p:sp>
+        <p:nvSpPr>
+          <p:cNvPr id="8" name="TextBox 7"/>
           <p:cNvSpPr txBox="1"/>
           <p:nvPr/>
         </p:nvSpPr>
         <p:spPr>
           <a:xfrm>
-            <a:off x="822960" y="1920240"/>
+            <a:off x="822960" y="1965960"/>
             <a:ext cx="4983480" cy="4206240"/>
           </a:xfrm>
           <a:prstGeom prst="rect">
@@ -5033,17 +5188,17 @@
           <a:p>
             <a:pPr>
               <a:spcAft>
-                <a:spcPts val="1000"/>
+                <a:spcPts val="1100"/>
               </a:spcAft>
             </a:pPr>
             <a:r>
               <a:rPr sz="1600" b="1" i="0">
                 <a:solidFill>
-                  <a:srgbClr val="2E3A80"/>
-                </a:solidFill>
-                <a:latin typeface="Montserrat"/>
-              </a:rPr>
-              <a:t>•  </a:t>
+                  <a:srgbClr val="E8801A"/>
+                </a:solidFill>
+                <a:latin typeface="Montserrat"/>
+              </a:rPr>
+              <a:t>▸  </a:t>
             </a:r>
             <a:r>
               <a:rPr sz="1600" b="0" i="0">
@@ -5052,23 +5207,23 @@
                 </a:solidFill>
                 <a:latin typeface="Montserrat"/>
               </a:rPr>
-              <a:t>Limitador de caudal 1,6 m³/h</a:t>
+              <a:t>Exterior: negro con 3 líneas amarillas</a:t>
             </a:r>
           </a:p>
           <a:p>
             <a:pPr>
               <a:spcAft>
-                <a:spcPts val="1000"/>
+                <a:spcPts val="1100"/>
               </a:spcAft>
             </a:pPr>
             <a:r>
               <a:rPr sz="1600" b="1" i="0">
                 <a:solidFill>
-                  <a:srgbClr val="2E3A80"/>
-                </a:solidFill>
-                <a:latin typeface="Montserrat"/>
-              </a:rPr>
-              <a:t>•  </a:t>
+                  <a:srgbClr val="E8801A"/>
+                </a:solidFill>
+                <a:latin typeface="Montserrat"/>
+              </a:rPr>
+              <a:t>▸  </a:t>
             </a:r>
             <a:r>
               <a:rPr sz="1600" b="0" i="0">
@@ -5077,23 +5232,23 @@
                 </a:solidFill>
                 <a:latin typeface="Montserrat"/>
               </a:rPr>
-              <a:t>Limitador de temperatura 96 ºC</a:t>
+              <a:t>Interior: normalmente amarillo</a:t>
             </a:r>
           </a:p>
           <a:p>
             <a:pPr>
               <a:spcAft>
-                <a:spcPts val="1000"/>
+                <a:spcPts val="1100"/>
               </a:spcAft>
             </a:pPr>
             <a:r>
               <a:rPr sz="1600" b="1" i="0">
                 <a:solidFill>
-                  <a:srgbClr val="2E3A80"/>
-                </a:solidFill>
-                <a:latin typeface="Montserrat"/>
-              </a:rPr>
-              <a:t>•  </a:t>
+                  <a:srgbClr val="E8801A"/>
+                </a:solidFill>
+                <a:latin typeface="Montserrat"/>
+              </a:rPr>
+              <a:t>▸  </a:t>
             </a:r>
             <a:r>
               <a:rPr sz="1600" b="0" i="0">
@@ -5102,23 +5257,23 @@
                 </a:solidFill>
                 <a:latin typeface="Montserrat"/>
               </a:rPr>
-              <a:t>Uno por instalación individual, por fuera</a:t>
+              <a:t>Resistente a los rayos UV en exterior</a:t>
             </a:r>
           </a:p>
           <a:p>
             <a:pPr>
               <a:spcAft>
-                <a:spcPts val="1000"/>
+                <a:spcPts val="1100"/>
               </a:spcAft>
             </a:pPr>
             <a:r>
               <a:rPr sz="1600" b="1" i="0">
                 <a:solidFill>
-                  <a:srgbClr val="2E3A80"/>
-                </a:solidFill>
-                <a:latin typeface="Montserrat"/>
-              </a:rPr>
-              <a:t>•  </a:t>
+                  <a:srgbClr val="E8801A"/>
+                </a:solidFill>
+                <a:latin typeface="Montserrat"/>
+              </a:rPr>
+              <a:t>▸  </a:t>
             </a:r>
             <a:r>
               <a:rPr sz="1600" b="0" i="0">
@@ -5127,14 +5282,14 @@
                 </a:solidFill>
                 <a:latin typeface="Montserrat"/>
               </a:rPr>
-              <a:t>Corrugado inox: ≤ 0,5 bar y roscado</a:t>
-            </a:r>
-          </a:p>
-        </p:txBody>
-      </p:sp>
-      <p:sp>
-        <p:nvSpPr>
-          <p:cNvPr id="8" name="imgph" descr="IMGQ:gas valve with flow limiter kitchen"/>
+              <a:t>Si se pinta: testigos de gas visibles</a:t>
+            </a:r>
+          </a:p>
+        </p:txBody>
+      </p:sp>
+      <p:sp>
+        <p:nvSpPr>
+          <p:cNvPr id="9" name="imgph" descr="IMGQ:yellow multilayer gas pipe"/>
           <p:cNvSpPr/>
           <p:nvPr/>
         </p:nvSpPr>
@@ -5180,7 +5335,7 @@
       </p:sp>
       <p:sp>
         <p:nvSpPr>
-          <p:cNvPr id="9" name="TextBox 8"/>
+          <p:cNvPr id="10" name="TextBox 9"/>
           <p:cNvSpPr txBox="1"/>
           <p:nvPr/>
         </p:nvSpPr>
@@ -5220,7 +5375,7 @@
                 </a:solidFill>
                 <a:latin typeface="Montserrat"/>
               </a:rPr>
-              <a:t>gas valve with flow limiter kitchen</a:t>
+              <a:t>yellow multilayer gas pipe</a:t>
             </a:r>
           </a:p>
         </p:txBody>
@@ -5317,7 +5472,7 @@
                 </a:solidFill>
                 <a:latin typeface="Montserrat"/>
               </a:rPr>
-              <a:t>011 / 016</a:t>
+              <a:t>011 / 017</a:t>
             </a:r>
           </a:p>
         </p:txBody>
@@ -5365,7 +5520,7 @@
         <p:spPr>
           <a:xfrm>
             <a:off x="822960" y="457200"/>
-            <a:ext cx="8229600" cy="365760"/>
+            <a:ext cx="10058400" cy="365760"/>
           </a:xfrm>
           <a:prstGeom prst="rect">
             <a:avLst/>
@@ -5379,13 +5534,13 @@
           <a:lstStyle/>
           <a:p>
             <a:r>
-              <a:rPr sz="1200" b="1" i="0">
-                <a:solidFill>
-                  <a:srgbClr val="64748B"/>
-                </a:solidFill>
-                <a:latin typeface="Montserrat"/>
-              </a:rPr>
-              <a:t>VAINAS Y CONDUCTOS</a:t>
+              <a:rPr sz="1300" b="1" i="0">
+                <a:solidFill>
+                  <a:srgbClr val="E8801A"/>
+                </a:solidFill>
+                <a:latin typeface="Montserrat"/>
+              </a:rPr>
+              <a:t>LIMITADORES</a:t>
             </a:r>
           </a:p>
         </p:txBody>
@@ -5413,26 +5568,70 @@
           <a:lstStyle/>
           <a:p>
             <a:r>
-              <a:rPr sz="2700" b="1" i="0">
+              <a:rPr sz="2800" b="1" i="0">
                 <a:solidFill>
                   <a:srgbClr val="1E2761"/>
                 </a:solidFill>
                 <a:latin typeface="Montserrat"/>
               </a:rPr>
-              <a:t>Vaina no es lo mismo que vaina</a:t>
-            </a:r>
-          </a:p>
-        </p:txBody>
-      </p:sp>
-      <p:sp>
-        <p:nvSpPr>
-          <p:cNvPr id="7" name="TextBox 6"/>
+              <a:t>Cocina de multicapa: caudal y temperatura</a:t>
+            </a:r>
+          </a:p>
+        </p:txBody>
+      </p:sp>
+      <p:sp>
+        <p:nvSpPr>
+          <p:cNvPr id="7" name="Rounded Rectangle 6"/>
+          <p:cNvSpPr/>
+          <p:nvPr/>
+        </p:nvSpPr>
+        <p:spPr>
+          <a:xfrm>
+            <a:off x="868680" y="1627632"/>
+            <a:ext cx="2011680" cy="73152"/>
+          </a:xfrm>
+          <a:prstGeom prst="roundRect">
+            <a:avLst/>
+          </a:prstGeom>
+          <a:solidFill>
+            <a:srgbClr val="E8801A"/>
+          </a:solidFill>
+          <a:ln>
+            <a:noFill/>
+          </a:ln>
+          <a:effectLst/>
+        </p:spPr>
+        <p:style>
+          <a:lnRef idx="1">
+            <a:schemeClr val="accent1"/>
+          </a:lnRef>
+          <a:fillRef idx="3">
+            <a:schemeClr val="accent1"/>
+          </a:fillRef>
+          <a:effectRef idx="2">
+            <a:schemeClr val="accent1"/>
+          </a:effectRef>
+          <a:fontRef idx="minor">
+            <a:schemeClr val="lt1"/>
+          </a:fontRef>
+        </p:style>
+        <p:txBody>
+          <a:bodyPr rtlCol="0" anchor="ctr"/>
+          <a:lstStyle/>
+          <a:p>
+            <a:pPr algn="ctr"/>
+          </a:p>
+        </p:txBody>
+      </p:sp>
+      <p:sp>
+        <p:nvSpPr>
+          <p:cNvPr id="8" name="TextBox 7"/>
           <p:cNvSpPr txBox="1"/>
           <p:nvPr/>
         </p:nvSpPr>
         <p:spPr>
           <a:xfrm>
-            <a:off x="822960" y="1920240"/>
+            <a:off x="822960" y="1965960"/>
             <a:ext cx="4983480" cy="4206240"/>
           </a:xfrm>
           <a:prstGeom prst="rect">
@@ -5448,17 +5647,17 @@
           <a:p>
             <a:pPr>
               <a:spcAft>
-                <a:spcPts val="1000"/>
+                <a:spcPts val="1100"/>
               </a:spcAft>
             </a:pPr>
             <a:r>
               <a:rPr sz="1600" b="1" i="0">
                 <a:solidFill>
-                  <a:srgbClr val="2E3A80"/>
-                </a:solidFill>
-                <a:latin typeface="Montserrat"/>
-              </a:rPr>
-              <a:t>•  </a:t>
+                  <a:srgbClr val="E8801A"/>
+                </a:solidFill>
+                <a:latin typeface="Montserrat"/>
+              </a:rPr>
+              <a:t>▸  </a:t>
             </a:r>
             <a:r>
               <a:rPr sz="1600" b="0" i="0">
@@ -5467,23 +5666,23 @@
                 </a:solidFill>
                 <a:latin typeface="Montserrat"/>
               </a:rPr>
-              <a:t>Proteger: golpes, garajes, vía pública</a:t>
+              <a:t>Limitador de caudal 1,6 m³/h</a:t>
             </a:r>
           </a:p>
           <a:p>
             <a:pPr>
               <a:spcAft>
-                <a:spcPts val="1000"/>
+                <a:spcPts val="1100"/>
               </a:spcAft>
             </a:pPr>
             <a:r>
               <a:rPr sz="1600" b="1" i="0">
                 <a:solidFill>
-                  <a:srgbClr val="2E3A80"/>
-                </a:solidFill>
-                <a:latin typeface="Montserrat"/>
-              </a:rPr>
-              <a:t>•  </a:t>
+                  <a:srgbClr val="E8801A"/>
+                </a:solidFill>
+                <a:latin typeface="Montserrat"/>
+              </a:rPr>
+              <a:t>▸  </a:t>
             </a:r>
             <a:r>
               <a:rPr sz="1600" b="0" i="0">
@@ -5492,23 +5691,23 @@
                 </a:solidFill>
                 <a:latin typeface="Montserrat"/>
               </a:rPr>
-              <a:t>Vía pública: hasta 1,80 m de altura</a:t>
+              <a:t>Limitador de temperatura 96 ºC</a:t>
             </a:r>
           </a:p>
           <a:p>
             <a:pPr>
               <a:spcAft>
-                <a:spcPts val="1000"/>
+                <a:spcPts val="1100"/>
               </a:spcAft>
             </a:pPr>
             <a:r>
               <a:rPr sz="1600" b="1" i="0">
                 <a:solidFill>
-                  <a:srgbClr val="2E3A80"/>
-                </a:solidFill>
-                <a:latin typeface="Montserrat"/>
-              </a:rPr>
-              <a:t>•  </a:t>
+                  <a:srgbClr val="E8801A"/>
+                </a:solidFill>
+                <a:latin typeface="Montserrat"/>
+              </a:rPr>
+              <a:t>▸  </a:t>
             </a:r>
             <a:r>
               <a:rPr sz="1600" b="0" i="0">
@@ -5517,23 +5716,23 @@
                 </a:solidFill>
                 <a:latin typeface="Montserrat"/>
               </a:rPr>
-              <a:t>Ventilar: falsos techos, altillos, huecos</a:t>
+              <a:t>Uno por instalación individual, por fuera</a:t>
             </a:r>
           </a:p>
           <a:p>
             <a:pPr>
               <a:spcAft>
-                <a:spcPts val="1000"/>
+                <a:spcPts val="1100"/>
               </a:spcAft>
             </a:pPr>
             <a:r>
               <a:rPr sz="1600" b="1" i="0">
                 <a:solidFill>
-                  <a:srgbClr val="2E3A80"/>
-                </a:solidFill>
-                <a:latin typeface="Montserrat"/>
-              </a:rPr>
-              <a:t>•  </a:t>
+                  <a:srgbClr val="E8801A"/>
+                </a:solidFill>
+                <a:latin typeface="Montserrat"/>
+              </a:rPr>
+              <a:t>▸  </a:t>
             </a:r>
             <a:r>
               <a:rPr sz="1600" b="0" i="0">
@@ -5542,14 +5741,14 @@
                 </a:solidFill>
                 <a:latin typeface="Montserrat"/>
               </a:rPr>
-              <a:t>Continuas y sin órganos de maniobra</a:t>
-            </a:r>
-          </a:p>
-        </p:txBody>
-      </p:sp>
-      <p:sp>
-        <p:nvSpPr>
-          <p:cNvPr id="8" name="imgph" descr="IMGQ:steel conduit protecting pipe in garage"/>
+              <a:t>Corrugado inox: ≤ 0,5 bar y roscado</a:t>
+            </a:r>
+          </a:p>
+        </p:txBody>
+      </p:sp>
+      <p:sp>
+        <p:nvSpPr>
+          <p:cNvPr id="9" name="imgph" descr="IMGQ:gas valve with flow limiter kitchen"/>
           <p:cNvSpPr/>
           <p:nvPr/>
         </p:nvSpPr>
@@ -5595,7 +5794,7 @@
       </p:sp>
       <p:sp>
         <p:nvSpPr>
-          <p:cNvPr id="9" name="TextBox 8"/>
+          <p:cNvPr id="10" name="TextBox 9"/>
           <p:cNvSpPr txBox="1"/>
           <p:nvPr/>
         </p:nvSpPr>
@@ -5635,7 +5834,7 @@
                 </a:solidFill>
                 <a:latin typeface="Montserrat"/>
               </a:rPr>
-              <a:t>steel conduit protecting pipe in garage</a:t>
+              <a:t>gas valve with flow limiter kitchen</a:t>
             </a:r>
           </a:p>
         </p:txBody>
@@ -5732,7 +5931,7 @@
                 </a:solidFill>
                 <a:latin typeface="Montserrat"/>
               </a:rPr>
-              <a:t>012 / 016</a:t>
+              <a:t>012 / 017</a:t>
             </a:r>
           </a:p>
         </p:txBody>
@@ -5780,7 +5979,7 @@
         <p:spPr>
           <a:xfrm>
             <a:off x="822960" y="457200"/>
-            <a:ext cx="8229600" cy="365760"/>
+            <a:ext cx="10058400" cy="365760"/>
           </a:xfrm>
           <a:prstGeom prst="rect">
             <a:avLst/>
@@ -5794,9 +5993,9 @@
           <a:lstStyle/>
           <a:p>
             <a:r>
-              <a:rPr sz="1200" b="1" i="0">
-                <a:solidFill>
-                  <a:srgbClr val="64748B"/>
+              <a:rPr sz="1300" b="1" i="0">
+                <a:solidFill>
+                  <a:srgbClr val="E8801A"/>
                 </a:solidFill>
                 <a:latin typeface="Montserrat"/>
               </a:rPr>
@@ -5828,26 +6027,70 @@
           <a:lstStyle/>
           <a:p>
             <a:r>
-              <a:rPr sz="2700" b="1" i="0">
+              <a:rPr sz="2800" b="1" i="0">
                 <a:solidFill>
                   <a:srgbClr val="1E2761"/>
                 </a:solidFill>
                 <a:latin typeface="Montserrat"/>
               </a:rPr>
-              <a:t>De obra 5 cm, de acero 1,5 mm</a:t>
-            </a:r>
-          </a:p>
-        </p:txBody>
-      </p:sp>
-      <p:sp>
-        <p:nvSpPr>
-          <p:cNvPr id="7" name="TextBox 6"/>
+              <a:t>Vaina no es lo mismo que vaina</a:t>
+            </a:r>
+          </a:p>
+        </p:txBody>
+      </p:sp>
+      <p:sp>
+        <p:nvSpPr>
+          <p:cNvPr id="7" name="Rounded Rectangle 6"/>
+          <p:cNvSpPr/>
+          <p:nvPr/>
+        </p:nvSpPr>
+        <p:spPr>
+          <a:xfrm>
+            <a:off x="868680" y="1627632"/>
+            <a:ext cx="2011680" cy="73152"/>
+          </a:xfrm>
+          <a:prstGeom prst="roundRect">
+            <a:avLst/>
+          </a:prstGeom>
+          <a:solidFill>
+            <a:srgbClr val="E8801A"/>
+          </a:solidFill>
+          <a:ln>
+            <a:noFill/>
+          </a:ln>
+          <a:effectLst/>
+        </p:spPr>
+        <p:style>
+          <a:lnRef idx="1">
+            <a:schemeClr val="accent1"/>
+          </a:lnRef>
+          <a:fillRef idx="3">
+            <a:schemeClr val="accent1"/>
+          </a:fillRef>
+          <a:effectRef idx="2">
+            <a:schemeClr val="accent1"/>
+          </a:effectRef>
+          <a:fontRef idx="minor">
+            <a:schemeClr val="lt1"/>
+          </a:fontRef>
+        </p:style>
+        <p:txBody>
+          <a:bodyPr rtlCol="0" anchor="ctr"/>
+          <a:lstStyle/>
+          <a:p>
+            <a:pPr algn="ctr"/>
+          </a:p>
+        </p:txBody>
+      </p:sp>
+      <p:sp>
+        <p:nvSpPr>
+          <p:cNvPr id="8" name="TextBox 7"/>
           <p:cNvSpPr txBox="1"/>
           <p:nvPr/>
         </p:nvSpPr>
         <p:spPr>
           <a:xfrm>
-            <a:off x="822960" y="1920240"/>
+            <a:off x="822960" y="1965960"/>
             <a:ext cx="4983480" cy="4206240"/>
           </a:xfrm>
           <a:prstGeom prst="rect">
@@ -5863,17 +6106,17 @@
           <a:p>
             <a:pPr>
               <a:spcAft>
-                <a:spcPts val="1000"/>
+                <a:spcPts val="1100"/>
               </a:spcAft>
             </a:pPr>
             <a:r>
               <a:rPr sz="1600" b="1" i="0">
                 <a:solidFill>
-                  <a:srgbClr val="2E3A80"/>
-                </a:solidFill>
-                <a:latin typeface="Montserrat"/>
-              </a:rPr>
-              <a:t>•  </a:t>
+                  <a:srgbClr val="E8801A"/>
+                </a:solidFill>
+                <a:latin typeface="Montserrat"/>
+              </a:rPr>
+              <a:t>▸  </a:t>
             </a:r>
             <a:r>
               <a:rPr sz="1600" b="0" i="0">
@@ -5882,23 +6125,23 @@
                 </a:solidFill>
                 <a:latin typeface="Montserrat"/>
               </a:rPr>
-              <a:t>Conducto de obra: mínimo 5 cm</a:t>
+              <a:t>Proteger: golpes, garajes, vía pública</a:t>
             </a:r>
           </a:p>
           <a:p>
             <a:pPr>
               <a:spcAft>
-                <a:spcPts val="1000"/>
+                <a:spcPts val="1100"/>
               </a:spcAft>
             </a:pPr>
             <a:r>
               <a:rPr sz="1600" b="1" i="0">
                 <a:solidFill>
-                  <a:srgbClr val="2E3A80"/>
-                </a:solidFill>
-                <a:latin typeface="Montserrat"/>
-              </a:rPr>
-              <a:t>•  </a:t>
+                  <a:srgbClr val="E8801A"/>
+                </a:solidFill>
+                <a:latin typeface="Montserrat"/>
+              </a:rPr>
+              <a:t>▸  </a:t>
             </a:r>
             <a:r>
               <a:rPr sz="1600" b="0" i="0">
@@ -5907,23 +6150,23 @@
                 </a:solidFill>
                 <a:latin typeface="Montserrat"/>
               </a:rPr>
-              <a:t>Conducto de acero: mínimo 1,5 mm</a:t>
+              <a:t>Vía pública: hasta 1,80 m de altura</a:t>
             </a:r>
           </a:p>
           <a:p>
             <a:pPr>
               <a:spcAft>
-                <a:spcPts val="1000"/>
+                <a:spcPts val="1100"/>
               </a:spcAft>
             </a:pPr>
             <a:r>
               <a:rPr sz="1600" b="1" i="0">
                 <a:solidFill>
-                  <a:srgbClr val="2E3A80"/>
-                </a:solidFill>
-                <a:latin typeface="Montserrat"/>
-              </a:rPr>
-              <a:t>•  </a:t>
+                  <a:srgbClr val="E8801A"/>
+                </a:solidFill>
+                <a:latin typeface="Montserrat"/>
+              </a:rPr>
+              <a:t>▸  </a:t>
             </a:r>
             <a:r>
               <a:rPr sz="1600" b="0" i="0">
@@ -5932,23 +6175,23 @@
                 </a:solidFill>
                 <a:latin typeface="Montserrat"/>
               </a:rPr>
-              <a:t>Ventilación: garantizar la estanqueidad</a:t>
+              <a:t>Ventilar: falsos techos, altillos, huecos</a:t>
             </a:r>
           </a:p>
           <a:p>
             <a:pPr>
               <a:spcAft>
-                <a:spcPts val="1000"/>
+                <a:spcPts val="1100"/>
               </a:spcAft>
             </a:pPr>
             <a:r>
               <a:rPr sz="1600" b="1" i="0">
                 <a:solidFill>
-                  <a:srgbClr val="2E3A80"/>
-                </a:solidFill>
-                <a:latin typeface="Montserrat"/>
-              </a:rPr>
-              <a:t>•  </a:t>
+                  <a:srgbClr val="E8801A"/>
+                </a:solidFill>
+                <a:latin typeface="Montserrat"/>
+              </a:rPr>
+              <a:t>▸  </a:t>
             </a:r>
             <a:r>
               <a:rPr sz="1600" b="0" i="0">
@@ -5957,14 +6200,14 @@
                 </a:solidFill>
                 <a:latin typeface="Montserrat"/>
               </a:rPr>
-              <a:t>Metálica: sin tocar otras estructuras</a:t>
-            </a:r>
-          </a:p>
-        </p:txBody>
-      </p:sp>
-      <p:sp>
-        <p:nvSpPr>
-          <p:cNvPr id="8" name="imgph" descr="IMGQ:steel pipe sleeve through wall"/>
+              <a:t>Continuas y sin órganos de maniobra</a:t>
+            </a:r>
+          </a:p>
+        </p:txBody>
+      </p:sp>
+      <p:sp>
+        <p:nvSpPr>
+          <p:cNvPr id="9" name="imgph" descr="IMGQ:steel conduit protecting pipe in garage"/>
           <p:cNvSpPr/>
           <p:nvPr/>
         </p:nvSpPr>
@@ -6010,7 +6253,7 @@
       </p:sp>
       <p:sp>
         <p:nvSpPr>
-          <p:cNvPr id="9" name="TextBox 8"/>
+          <p:cNvPr id="10" name="TextBox 9"/>
           <p:cNvSpPr txBox="1"/>
           <p:nvPr/>
         </p:nvSpPr>
@@ -6050,7 +6293,7 @@
                 </a:solidFill>
                 <a:latin typeface="Montserrat"/>
               </a:rPr>
-              <a:t>steel pipe sleeve through wall</a:t>
+              <a:t>steel conduit protecting pipe in garage</a:t>
             </a:r>
           </a:p>
         </p:txBody>
@@ -6147,7 +6390,7 @@
                 </a:solidFill>
                 <a:latin typeface="Montserrat"/>
               </a:rPr>
-              <a:t>013 / 016</a:t>
+              <a:t>013 / 017</a:t>
             </a:r>
           </a:p>
         </p:txBody>
@@ -6195,7 +6438,7 @@
         <p:spPr>
           <a:xfrm>
             <a:off x="822960" y="457200"/>
-            <a:ext cx="8229600" cy="365760"/>
+            <a:ext cx="10058400" cy="365760"/>
           </a:xfrm>
           <a:prstGeom prst="rect">
             <a:avLst/>
@@ -6209,13 +6452,13 @@
           <a:lstStyle/>
           <a:p>
             <a:r>
-              <a:rPr sz="1200" b="1" i="0">
-                <a:solidFill>
-                  <a:srgbClr val="64748B"/>
-                </a:solidFill>
-                <a:latin typeface="Montserrat"/>
-              </a:rPr>
-              <a:t>PRUEBA DE ESTANQUEIDAD</a:t>
+              <a:rPr sz="1300" b="1" i="0">
+                <a:solidFill>
+                  <a:srgbClr val="E8801A"/>
+                </a:solidFill>
+                <a:latin typeface="Montserrat"/>
+              </a:rPr>
+              <a:t>VAINAS Y CONDUCTOS</a:t>
             </a:r>
           </a:p>
         </p:txBody>
@@ -6243,26 +6486,70 @@
           <a:lstStyle/>
           <a:p>
             <a:r>
-              <a:rPr sz="2700" b="1" i="0">
+              <a:rPr sz="2800" b="1" i="0">
                 <a:solidFill>
                   <a:srgbClr val="1E2761"/>
                 </a:solidFill>
                 <a:latin typeface="Montserrat"/>
               </a:rPr>
-              <a:t>El examen final del tubo</a:t>
-            </a:r>
-          </a:p>
-        </p:txBody>
-      </p:sp>
-      <p:sp>
-        <p:nvSpPr>
-          <p:cNvPr id="7" name="TextBox 6"/>
+              <a:t>De obra 5 cm, de acero 1,5 mm</a:t>
+            </a:r>
+          </a:p>
+        </p:txBody>
+      </p:sp>
+      <p:sp>
+        <p:nvSpPr>
+          <p:cNvPr id="7" name="Rounded Rectangle 6"/>
+          <p:cNvSpPr/>
+          <p:nvPr/>
+        </p:nvSpPr>
+        <p:spPr>
+          <a:xfrm>
+            <a:off x="868680" y="1627632"/>
+            <a:ext cx="2011680" cy="73152"/>
+          </a:xfrm>
+          <a:prstGeom prst="roundRect">
+            <a:avLst/>
+          </a:prstGeom>
+          <a:solidFill>
+            <a:srgbClr val="E8801A"/>
+          </a:solidFill>
+          <a:ln>
+            <a:noFill/>
+          </a:ln>
+          <a:effectLst/>
+        </p:spPr>
+        <p:style>
+          <a:lnRef idx="1">
+            <a:schemeClr val="accent1"/>
+          </a:lnRef>
+          <a:fillRef idx="3">
+            <a:schemeClr val="accent1"/>
+          </a:fillRef>
+          <a:effectRef idx="2">
+            <a:schemeClr val="accent1"/>
+          </a:effectRef>
+          <a:fontRef idx="minor">
+            <a:schemeClr val="lt1"/>
+          </a:fontRef>
+        </p:style>
+        <p:txBody>
+          <a:bodyPr rtlCol="0" anchor="ctr"/>
+          <a:lstStyle/>
+          <a:p>
+            <a:pPr algn="ctr"/>
+          </a:p>
+        </p:txBody>
+      </p:sp>
+      <p:sp>
+        <p:nvSpPr>
+          <p:cNvPr id="8" name="TextBox 7"/>
           <p:cNvSpPr txBox="1"/>
           <p:nvPr/>
         </p:nvSpPr>
         <p:spPr>
           <a:xfrm>
-            <a:off x="822960" y="1920240"/>
+            <a:off x="822960" y="1965960"/>
             <a:ext cx="4983480" cy="4206240"/>
           </a:xfrm>
           <a:prstGeom prst="rect">
@@ -6278,17 +6565,17 @@
           <a:p>
             <a:pPr>
               <a:spcAft>
-                <a:spcPts val="1000"/>
+                <a:spcPts val="1100"/>
               </a:spcAft>
             </a:pPr>
             <a:r>
               <a:rPr sz="1600" b="1" i="0">
                 <a:solidFill>
-                  <a:srgbClr val="2E3A80"/>
-                </a:solidFill>
-                <a:latin typeface="Montserrat"/>
-              </a:rPr>
-              <a:t>•  </a:t>
+                  <a:srgbClr val="E8801A"/>
+                </a:solidFill>
+                <a:latin typeface="Montserrat"/>
+              </a:rPr>
+              <a:t>▸  </a:t>
             </a:r>
             <a:r>
               <a:rPr sz="1600" b="0" i="0">
@@ -6297,23 +6584,23 @@
                 </a:solidFill>
                 <a:latin typeface="Montserrat"/>
               </a:rPr>
-              <a:t>Toda instalación nueva se prueba</a:t>
+              <a:t>Conducto de obra: mínimo 5 cm</a:t>
             </a:r>
           </a:p>
           <a:p>
             <a:pPr>
               <a:spcAft>
-                <a:spcPts val="1000"/>
+                <a:spcPts val="1100"/>
               </a:spcAft>
             </a:pPr>
             <a:r>
               <a:rPr sz="1600" b="1" i="0">
                 <a:solidFill>
-                  <a:srgbClr val="2E3A80"/>
-                </a:solidFill>
-                <a:latin typeface="Montserrat"/>
-              </a:rPr>
-              <a:t>•  </a:t>
+                  <a:srgbClr val="E8801A"/>
+                </a:solidFill>
+                <a:latin typeface="Montserrat"/>
+              </a:rPr>
+              <a:t>▸  </a:t>
             </a:r>
             <a:r>
               <a:rPr sz="1600" b="0" i="0">
@@ -6322,23 +6609,23 @@
                 </a:solidFill>
                 <a:latin typeface="Montserrat"/>
               </a:rPr>
-              <a:t>Antes de la puesta en servicio</a:t>
+              <a:t>Conducto de acero: mínimo 1,5 mm</a:t>
             </a:r>
           </a:p>
           <a:p>
             <a:pPr>
               <a:spcAft>
-                <a:spcPts val="1000"/>
+                <a:spcPts val="1100"/>
               </a:spcAft>
             </a:pPr>
             <a:r>
               <a:rPr sz="1600" b="1" i="0">
                 <a:solidFill>
-                  <a:srgbClr val="2E3A80"/>
-                </a:solidFill>
-                <a:latin typeface="Montserrat"/>
-              </a:rPr>
-              <a:t>•  </a:t>
+                  <a:srgbClr val="E8801A"/>
+                </a:solidFill>
+                <a:latin typeface="Montserrat"/>
+              </a:rPr>
+              <a:t>▸  </a:t>
             </a:r>
             <a:r>
               <a:rPr sz="1600" b="0" i="0">
@@ -6347,23 +6634,23 @@
                 </a:solidFill>
                 <a:latin typeface="Montserrat"/>
               </a:rPr>
-              <a:t>UNE 60670 parte 8</a:t>
+              <a:t>Ventilación: garantizar la estanqueidad</a:t>
             </a:r>
           </a:p>
           <a:p>
             <a:pPr>
               <a:spcAft>
-                <a:spcPts val="1000"/>
+                <a:spcPts val="1100"/>
               </a:spcAft>
             </a:pPr>
             <a:r>
               <a:rPr sz="1600" b="1" i="0">
                 <a:solidFill>
-                  <a:srgbClr val="2E3A80"/>
-                </a:solidFill>
-                <a:latin typeface="Montserrat"/>
-              </a:rPr>
-              <a:t>•  </a:t>
+                  <a:srgbClr val="E8801A"/>
+                </a:solidFill>
+                <a:latin typeface="Montserrat"/>
+              </a:rPr>
+              <a:t>▸  </a:t>
             </a:r>
             <a:r>
               <a:rPr sz="1600" b="0" i="0">
@@ -6372,14 +6659,14 @@
                 </a:solidFill>
                 <a:latin typeface="Montserrat"/>
               </a:rPr>
-              <a:t>Regulación y contadores no se prueban</a:t>
-            </a:r>
-          </a:p>
-        </p:txBody>
-      </p:sp>
-      <p:sp>
-        <p:nvSpPr>
-          <p:cNvPr id="8" name="imgph" descr="IMGQ:pressure gauge manometer on pipe"/>
+              <a:t>Metálica: sin tocar otras estructuras</a:t>
+            </a:r>
+          </a:p>
+        </p:txBody>
+      </p:sp>
+      <p:sp>
+        <p:nvSpPr>
+          <p:cNvPr id="9" name="imgph" descr="IMGQ:steel pipe sleeve through wall"/>
           <p:cNvSpPr/>
           <p:nvPr/>
         </p:nvSpPr>
@@ -6425,7 +6712,7 @@
       </p:sp>
       <p:sp>
         <p:nvSpPr>
-          <p:cNvPr id="9" name="TextBox 8"/>
+          <p:cNvPr id="10" name="TextBox 9"/>
           <p:cNvSpPr txBox="1"/>
           <p:nvPr/>
         </p:nvSpPr>
@@ -6465,7 +6752,7 @@
                 </a:solidFill>
                 <a:latin typeface="Montserrat"/>
               </a:rPr>
-              <a:t>pressure gauge manometer on pipe</a:t>
+              <a:t>steel pipe sleeve through wall</a:t>
             </a:r>
           </a:p>
         </p:txBody>
@@ -6562,7 +6849,7 @@
                 </a:solidFill>
                 <a:latin typeface="Montserrat"/>
               </a:rPr>
-              <a:t>014 / 016</a:t>
+              <a:t>014 / 017</a:t>
             </a:r>
           </a:p>
         </p:txBody>
@@ -6610,7 +6897,7 @@
         <p:spPr>
           <a:xfrm>
             <a:off x="822960" y="457200"/>
-            <a:ext cx="8229600" cy="365760"/>
+            <a:ext cx="10058400" cy="365760"/>
           </a:xfrm>
           <a:prstGeom prst="rect">
             <a:avLst/>
@@ -6624,13 +6911,13 @@
           <a:lstStyle/>
           <a:p>
             <a:r>
-              <a:rPr sz="1200" b="1" i="0">
-                <a:solidFill>
-                  <a:srgbClr val="64748B"/>
-                </a:solidFill>
-                <a:latin typeface="Montserrat"/>
-              </a:rPr>
-              <a:t>PRESIONES Y TIEMPOS</a:t>
+              <a:rPr sz="1300" b="1" i="0">
+                <a:solidFill>
+                  <a:srgbClr val="E8801A"/>
+                </a:solidFill>
+                <a:latin typeface="Montserrat"/>
+              </a:rPr>
+              <a:t>PRUEBA DE ESTANQUEIDAD</a:t>
             </a:r>
           </a:p>
         </p:txBody>
@@ -6658,26 +6945,70 @@
           <a:lstStyle/>
           <a:p>
             <a:r>
-              <a:rPr sz="2700" b="1" i="0">
+              <a:rPr sz="2800" b="1" i="0">
                 <a:solidFill>
                   <a:srgbClr val="1E2761"/>
                 </a:solidFill>
                 <a:latin typeface="Montserrat"/>
               </a:rPr>
-              <a:t>Los tiempos base de la prueba</a:t>
-            </a:r>
-          </a:p>
-        </p:txBody>
-      </p:sp>
-      <p:sp>
-        <p:nvSpPr>
-          <p:cNvPr id="7" name="TextBox 6"/>
+              <a:t>El examen final del tubo</a:t>
+            </a:r>
+          </a:p>
+        </p:txBody>
+      </p:sp>
+      <p:sp>
+        <p:nvSpPr>
+          <p:cNvPr id="7" name="Rounded Rectangle 6"/>
+          <p:cNvSpPr/>
+          <p:nvPr/>
+        </p:nvSpPr>
+        <p:spPr>
+          <a:xfrm>
+            <a:off x="868680" y="1627632"/>
+            <a:ext cx="2011680" cy="73152"/>
+          </a:xfrm>
+          <a:prstGeom prst="roundRect">
+            <a:avLst/>
+          </a:prstGeom>
+          <a:solidFill>
+            <a:srgbClr val="E8801A"/>
+          </a:solidFill>
+          <a:ln>
+            <a:noFill/>
+          </a:ln>
+          <a:effectLst/>
+        </p:spPr>
+        <p:style>
+          <a:lnRef idx="1">
+            <a:schemeClr val="accent1"/>
+          </a:lnRef>
+          <a:fillRef idx="3">
+            <a:schemeClr val="accent1"/>
+          </a:fillRef>
+          <a:effectRef idx="2">
+            <a:schemeClr val="accent1"/>
+          </a:effectRef>
+          <a:fontRef idx="minor">
+            <a:schemeClr val="lt1"/>
+          </a:fontRef>
+        </p:style>
+        <p:txBody>
+          <a:bodyPr rtlCol="0" anchor="ctr"/>
+          <a:lstStyle/>
+          <a:p>
+            <a:pPr algn="ctr"/>
+          </a:p>
+        </p:txBody>
+      </p:sp>
+      <p:sp>
+        <p:nvSpPr>
+          <p:cNvPr id="8" name="TextBox 7"/>
           <p:cNvSpPr txBox="1"/>
           <p:nvPr/>
         </p:nvSpPr>
         <p:spPr>
           <a:xfrm>
-            <a:off x="822960" y="1920240"/>
+            <a:off x="822960" y="1965960"/>
             <a:ext cx="4983480" cy="4206240"/>
           </a:xfrm>
           <a:prstGeom prst="rect">
@@ -6693,17 +7024,17 @@
           <a:p>
             <a:pPr>
               <a:spcAft>
-                <a:spcPts val="1000"/>
+                <a:spcPts val="1100"/>
               </a:spcAft>
             </a:pPr>
             <a:r>
               <a:rPr sz="1600" b="1" i="0">
                 <a:solidFill>
-                  <a:srgbClr val="2E3A80"/>
-                </a:solidFill>
-                <a:latin typeface="Montserrat"/>
-              </a:rPr>
-              <a:t>•  </a:t>
+                  <a:srgbClr val="E8801A"/>
+                </a:solidFill>
+                <a:latin typeface="Montserrat"/>
+              </a:rPr>
+              <a:t>▸  </a:t>
             </a:r>
             <a:r>
               <a:rPr sz="1600" b="0" i="0">
@@ -6712,23 +7043,23 @@
                 </a:solidFill>
                 <a:latin typeface="Montserrat"/>
               </a:rPr>
-              <a:t>MOP 2–5 bar → 60 min</a:t>
+              <a:t>Toda instalación nueva se prueba</a:t>
             </a:r>
           </a:p>
           <a:p>
             <a:pPr>
               <a:spcAft>
-                <a:spcPts val="1000"/>
+                <a:spcPts val="1100"/>
               </a:spcAft>
             </a:pPr>
             <a:r>
               <a:rPr sz="1600" b="1" i="0">
                 <a:solidFill>
-                  <a:srgbClr val="2E3A80"/>
-                </a:solidFill>
-                <a:latin typeface="Montserrat"/>
-              </a:rPr>
-              <a:t>•  </a:t>
+                  <a:srgbClr val="E8801A"/>
+                </a:solidFill>
+                <a:latin typeface="Montserrat"/>
+              </a:rPr>
+              <a:t>▸  </a:t>
             </a:r>
             <a:r>
               <a:rPr sz="1600" b="0" i="0">
@@ -6737,23 +7068,23 @@
                 </a:solidFill>
                 <a:latin typeface="Montserrat"/>
               </a:rPr>
-              <a:t>MOP 0,4–2 bar → 30 min</a:t>
+              <a:t>Antes de la puesta en servicio</a:t>
             </a:r>
           </a:p>
           <a:p>
             <a:pPr>
               <a:spcAft>
-                <a:spcPts val="1000"/>
+                <a:spcPts val="1100"/>
               </a:spcAft>
             </a:pPr>
             <a:r>
               <a:rPr sz="1600" b="1" i="0">
                 <a:solidFill>
-                  <a:srgbClr val="2E3A80"/>
-                </a:solidFill>
-                <a:latin typeface="Montserrat"/>
-              </a:rPr>
-              <a:t>•  </a:t>
+                  <a:srgbClr val="E8801A"/>
+                </a:solidFill>
+                <a:latin typeface="Montserrat"/>
+              </a:rPr>
+              <a:t>▸  </a:t>
             </a:r>
             <a:r>
               <a:rPr sz="1600" b="0" i="0">
@@ -6762,23 +7093,23 @@
                 </a:solidFill>
                 <a:latin typeface="Montserrat"/>
               </a:rPr>
-              <a:t>MOP 0,05–0,4 bar → 30 min</a:t>
+              <a:t>UNE 60670 parte 8</a:t>
             </a:r>
           </a:p>
           <a:p>
             <a:pPr>
               <a:spcAft>
-                <a:spcPts val="1000"/>
+                <a:spcPts val="1100"/>
               </a:spcAft>
             </a:pPr>
             <a:r>
               <a:rPr sz="1600" b="1" i="0">
                 <a:solidFill>
-                  <a:srgbClr val="2E3A80"/>
-                </a:solidFill>
-                <a:latin typeface="Montserrat"/>
-              </a:rPr>
-              <a:t>•  </a:t>
+                  <a:srgbClr val="E8801A"/>
+                </a:solidFill>
+                <a:latin typeface="Montserrat"/>
+              </a:rPr>
+              <a:t>▸  </a:t>
             </a:r>
             <a:r>
               <a:rPr sz="1600" b="0" i="0">
@@ -6787,14 +7118,14 @@
                 </a:solidFill>
                 <a:latin typeface="Montserrat"/>
               </a:rPr>
-              <a:t>MOP ≤ 0,05 bar → 15 min</a:t>
-            </a:r>
-          </a:p>
-        </p:txBody>
-      </p:sp>
-      <p:sp>
-        <p:nvSpPr>
-          <p:cNvPr id="8" name="imgph" descr="IMGQ:digital pressure gauge display reading"/>
+              <a:t>Regulación y contadores no se prueban</a:t>
+            </a:r>
+          </a:p>
+        </p:txBody>
+      </p:sp>
+      <p:sp>
+        <p:nvSpPr>
+          <p:cNvPr id="9" name="imgph" descr="IMGQ:pressure gauge manometer on pipe"/>
           <p:cNvSpPr/>
           <p:nvPr/>
         </p:nvSpPr>
@@ -6840,7 +7171,7 @@
       </p:sp>
       <p:sp>
         <p:nvSpPr>
-          <p:cNvPr id="9" name="TextBox 8"/>
+          <p:cNvPr id="10" name="TextBox 9"/>
           <p:cNvSpPr txBox="1"/>
           <p:nvPr/>
         </p:nvSpPr>
@@ -6880,7 +7211,7 @@
                 </a:solidFill>
                 <a:latin typeface="Montserrat"/>
               </a:rPr>
-              <a:t>digital pressure gauge display reading</a:t>
+              <a:t>pressure gauge manometer on pipe</a:t>
             </a:r>
           </a:p>
         </p:txBody>
@@ -6977,7 +7308,7 @@
                 </a:solidFill>
                 <a:latin typeface="Montserrat"/>
               </a:rPr>
-              <a:t>015 / 016</a:t>
+              <a:t>015 / 017</a:t>
             </a:r>
           </a:p>
         </p:txBody>
@@ -7025,7 +7356,7 @@
         <p:spPr>
           <a:xfrm>
             <a:off x="822960" y="457200"/>
-            <a:ext cx="8229600" cy="365760"/>
+            <a:ext cx="10058400" cy="365760"/>
           </a:xfrm>
           <a:prstGeom prst="rect">
             <a:avLst/>
@@ -7039,13 +7370,13 @@
           <a:lstStyle/>
           <a:p>
             <a:r>
-              <a:rPr sz="1200" b="1" i="0">
-                <a:solidFill>
-                  <a:srgbClr val="64748B"/>
-                </a:solidFill>
-                <a:latin typeface="Montserrat"/>
-              </a:rPr>
-              <a:t>PRUEBA BIEN HECHA</a:t>
+              <a:rPr sz="1300" b="1" i="0">
+                <a:solidFill>
+                  <a:srgbClr val="E8801A"/>
+                </a:solidFill>
+                <a:latin typeface="Montserrat"/>
+              </a:rPr>
+              <a:t>PRESIONES Y TIEMPOS</a:t>
             </a:r>
           </a:p>
         </p:txBody>
@@ -7073,26 +7404,70 @@
           <a:lstStyle/>
           <a:p>
             <a:r>
-              <a:rPr sz="2700" b="1" i="0">
+              <a:rPr sz="2800" b="1" i="0">
                 <a:solidFill>
                   <a:srgbClr val="1E2761"/>
                 </a:solidFill>
                 <a:latin typeface="Montserrat"/>
               </a:rPr>
-              <a:t>Manómetro fino y aparatos desmontados</a:t>
-            </a:r>
-          </a:p>
-        </p:txBody>
-      </p:sp>
-      <p:sp>
-        <p:nvSpPr>
-          <p:cNvPr id="7" name="TextBox 6"/>
+              <a:t>Los tiempos base de la prueba</a:t>
+            </a:r>
+          </a:p>
+        </p:txBody>
+      </p:sp>
+      <p:sp>
+        <p:nvSpPr>
+          <p:cNvPr id="7" name="Rounded Rectangle 6"/>
+          <p:cNvSpPr/>
+          <p:nvPr/>
+        </p:nvSpPr>
+        <p:spPr>
+          <a:xfrm>
+            <a:off x="868680" y="1627632"/>
+            <a:ext cx="2011680" cy="73152"/>
+          </a:xfrm>
+          <a:prstGeom prst="roundRect">
+            <a:avLst/>
+          </a:prstGeom>
+          <a:solidFill>
+            <a:srgbClr val="E8801A"/>
+          </a:solidFill>
+          <a:ln>
+            <a:noFill/>
+          </a:ln>
+          <a:effectLst/>
+        </p:spPr>
+        <p:style>
+          <a:lnRef idx="1">
+            <a:schemeClr val="accent1"/>
+          </a:lnRef>
+          <a:fillRef idx="3">
+            <a:schemeClr val="accent1"/>
+          </a:fillRef>
+          <a:effectRef idx="2">
+            <a:schemeClr val="accent1"/>
+          </a:effectRef>
+          <a:fontRef idx="minor">
+            <a:schemeClr val="lt1"/>
+          </a:fontRef>
+        </p:style>
+        <p:txBody>
+          <a:bodyPr rtlCol="0" anchor="ctr"/>
+          <a:lstStyle/>
+          <a:p>
+            <a:pPr algn="ctr"/>
+          </a:p>
+        </p:txBody>
+      </p:sp>
+      <p:sp>
+        <p:nvSpPr>
+          <p:cNvPr id="8" name="TextBox 7"/>
           <p:cNvSpPr txBox="1"/>
           <p:nvPr/>
         </p:nvSpPr>
         <p:spPr>
           <a:xfrm>
-            <a:off x="822960" y="1920240"/>
+            <a:off x="822960" y="1965960"/>
             <a:ext cx="4983480" cy="4206240"/>
           </a:xfrm>
           <a:prstGeom prst="rect">
@@ -7108,17 +7483,17 @@
           <a:p>
             <a:pPr>
               <a:spcAft>
-                <a:spcPts val="1000"/>
+                <a:spcPts val="1100"/>
               </a:spcAft>
             </a:pPr>
             <a:r>
               <a:rPr sz="1600" b="1" i="0">
                 <a:solidFill>
-                  <a:srgbClr val="2E3A80"/>
-                </a:solidFill>
-                <a:latin typeface="Montserrat"/>
-              </a:rPr>
-              <a:t>•  </a:t>
+                  <a:srgbClr val="E8801A"/>
+                </a:solidFill>
+                <a:latin typeface="Montserrat"/>
+              </a:rPr>
+              <a:t>▸  </a:t>
             </a:r>
             <a:r>
               <a:rPr sz="1600" b="0" i="0">
@@ -7127,23 +7502,23 @@
                 </a:solidFill>
                 <a:latin typeface="Montserrat"/>
               </a:rPr>
-              <a:t>Aguja entre 35 % y 75 %</a:t>
+              <a:t>MOP 2–5 bar → 60 min</a:t>
             </a:r>
           </a:p>
           <a:p>
             <a:pPr>
               <a:spcAft>
-                <a:spcPts val="1000"/>
+                <a:spcPts val="1100"/>
               </a:spcAft>
             </a:pPr>
             <a:r>
               <a:rPr sz="1600" b="1" i="0">
                 <a:solidFill>
-                  <a:srgbClr val="2E3A80"/>
-                </a:solidFill>
-                <a:latin typeface="Montserrat"/>
-              </a:rPr>
-              <a:t>•  </a:t>
+                  <a:srgbClr val="E8801A"/>
+                </a:solidFill>
+                <a:latin typeface="Montserrat"/>
+              </a:rPr>
+              <a:t>▸  </a:t>
             </a:r>
             <a:r>
               <a:rPr sz="1600" b="0" i="0">
@@ -7152,23 +7527,23 @@
                 </a:solidFill>
                 <a:latin typeface="Montserrat"/>
               </a:rPr>
-              <a:t>Baja presión: columna de agua en U</a:t>
+              <a:t>MOP 0,4–2 bar → 30 min</a:t>
             </a:r>
           </a:p>
           <a:p>
             <a:pPr>
               <a:spcAft>
-                <a:spcPts val="1000"/>
+                <a:spcPts val="1100"/>
               </a:spcAft>
             </a:pPr>
             <a:r>
               <a:rPr sz="1600" b="1" i="0">
                 <a:solidFill>
-                  <a:srgbClr val="2E3A80"/>
-                </a:solidFill>
-                <a:latin typeface="Montserrat"/>
-              </a:rPr>
-              <a:t>•  </a:t>
+                  <a:srgbClr val="E8801A"/>
+                </a:solidFill>
+                <a:latin typeface="Montserrat"/>
+              </a:rPr>
+              <a:t>▸  </a:t>
             </a:r>
             <a:r>
               <a:rPr sz="1600" b="0" i="0">
@@ -7177,23 +7552,23 @@
                 </a:solidFill>
                 <a:latin typeface="Montserrat"/>
               </a:rPr>
-              <a:t>Desmonta electroválvulas y filtros</a:t>
+              <a:t>MOP 0,05–0,4 bar → 30 min</a:t>
             </a:r>
           </a:p>
           <a:p>
             <a:pPr>
               <a:spcAft>
-                <a:spcPts val="1000"/>
+                <a:spcPts val="1100"/>
               </a:spcAft>
             </a:pPr>
             <a:r>
               <a:rPr sz="1600" b="1" i="0">
                 <a:solidFill>
-                  <a:srgbClr val="2E3A80"/>
-                </a:solidFill>
-                <a:latin typeface="Montserrat"/>
-              </a:rPr>
-              <a:t>•  </a:t>
+                  <a:srgbClr val="E8801A"/>
+                </a:solidFill>
+                <a:latin typeface="Montserrat"/>
+              </a:rPr>
+              <a:t>▸  </a:t>
             </a:r>
             <a:r>
               <a:rPr sz="1600" b="0" i="0">
@@ -7202,14 +7577,14 @@
                 </a:solidFill>
                 <a:latin typeface="Montserrat"/>
               </a:rPr>
-              <a:t>Recomprueba a la MOP con todo montado</a:t>
-            </a:r>
-          </a:p>
-        </p:txBody>
-      </p:sp>
-      <p:sp>
-        <p:nvSpPr>
-          <p:cNvPr id="8" name="imgph" descr="IMGQ:U tube water column manometer"/>
+              <a:t>MOP ≤ 0,05 bar → 15 min</a:t>
+            </a:r>
+          </a:p>
+        </p:txBody>
+      </p:sp>
+      <p:sp>
+        <p:nvSpPr>
+          <p:cNvPr id="9" name="imgph" descr="IMGQ:digital pressure gauge display reading"/>
           <p:cNvSpPr/>
           <p:nvPr/>
         </p:nvSpPr>
@@ -7255,7 +7630,7 @@
       </p:sp>
       <p:sp>
         <p:nvSpPr>
-          <p:cNvPr id="9" name="TextBox 8"/>
+          <p:cNvPr id="10" name="TextBox 9"/>
           <p:cNvSpPr txBox="1"/>
           <p:nvPr/>
         </p:nvSpPr>
@@ -7295,7 +7670,7 @@
                 </a:solidFill>
                 <a:latin typeface="Montserrat"/>
               </a:rPr>
-              <a:t>U tube water column manometer</a:t>
+              <a:t>digital pressure gauge display reading</a:t>
             </a:r>
           </a:p>
         </p:txBody>
@@ -7333,6 +7708,465 @@
             <a:avLst/>
           </a:prstGeom>
           <a:solidFill>
+            <a:srgbClr val="FFFFFF"/>
+          </a:solidFill>
+          <a:ln>
+            <a:noFill/>
+          </a:ln>
+          <a:effectLst/>
+        </p:spPr>
+        <p:style>
+          <a:lnRef idx="1">
+            <a:schemeClr val="accent1"/>
+          </a:lnRef>
+          <a:fillRef idx="3">
+            <a:schemeClr val="accent1"/>
+          </a:fillRef>
+          <a:effectRef idx="2">
+            <a:schemeClr val="accent1"/>
+          </a:effectRef>
+          <a:fontRef idx="minor">
+            <a:schemeClr val="lt1"/>
+          </a:fontRef>
+        </p:style>
+        <p:txBody>
+          <a:bodyPr rtlCol="0" anchor="ctr"/>
+          <a:lstStyle/>
+          <a:p>
+            <a:pPr algn="ctr"/>
+          </a:p>
+        </p:txBody>
+      </p:sp>
+      <p:sp>
+        <p:nvSpPr>
+          <p:cNvPr id="3" name="TextBox 2"/>
+          <p:cNvSpPr txBox="1"/>
+          <p:nvPr/>
+        </p:nvSpPr>
+        <p:spPr>
+          <a:xfrm>
+            <a:off x="10607040" y="320040"/>
+            <a:ext cx="1371600" cy="365760"/>
+          </a:xfrm>
+          <a:prstGeom prst="rect">
+            <a:avLst/>
+          </a:prstGeom>
+          <a:noFill/>
+        </p:spPr>
+        <p:txBody>
+          <a:bodyPr wrap="square">
+            <a:spAutoFit/>
+          </a:bodyPr>
+          <a:lstStyle/>
+          <a:p>
+            <a:pPr algn="r"/>
+            <a:r>
+              <a:rPr sz="1000" b="1" i="0">
+                <a:solidFill>
+                  <a:srgbClr val="64748B"/>
+                </a:solidFill>
+                <a:latin typeface="Montserrat"/>
+              </a:rPr>
+              <a:t>016 / 017</a:t>
+            </a:r>
+          </a:p>
+        </p:txBody>
+      </p:sp>
+      <p:sp>
+        <p:nvSpPr>
+          <p:cNvPr id="4" name="TextBox 3"/>
+          <p:cNvSpPr txBox="1"/>
+          <p:nvPr/>
+        </p:nvSpPr>
+        <p:spPr>
+          <a:xfrm>
+            <a:off x="457200" y="6419088"/>
+            <a:ext cx="8229600" cy="365760"/>
+          </a:xfrm>
+          <a:prstGeom prst="rect">
+            <a:avLst/>
+          </a:prstGeom>
+          <a:noFill/>
+        </p:spPr>
+        <p:txBody>
+          <a:bodyPr wrap="square">
+            <a:spAutoFit/>
+          </a:bodyPr>
+          <a:lstStyle/>
+          <a:p>
+            <a:r>
+              <a:rPr sz="900" b="0" i="0">
+                <a:solidFill>
+                  <a:srgbClr val="64748B"/>
+                </a:solidFill>
+                <a:latin typeface="Montserrat"/>
+              </a:rPr>
+              <a:t>Curso Gas B · Tema 17 · Gas a la primera</a:t>
+            </a:r>
+          </a:p>
+        </p:txBody>
+      </p:sp>
+      <p:sp>
+        <p:nvSpPr>
+          <p:cNvPr id="5" name="TextBox 4"/>
+          <p:cNvSpPr txBox="1"/>
+          <p:nvPr/>
+        </p:nvSpPr>
+        <p:spPr>
+          <a:xfrm>
+            <a:off x="822960" y="457200"/>
+            <a:ext cx="10058400" cy="365760"/>
+          </a:xfrm>
+          <a:prstGeom prst="rect">
+            <a:avLst/>
+          </a:prstGeom>
+          <a:noFill/>
+        </p:spPr>
+        <p:txBody>
+          <a:bodyPr wrap="square">
+            <a:spAutoFit/>
+          </a:bodyPr>
+          <a:lstStyle/>
+          <a:p>
+            <a:r>
+              <a:rPr sz="1300" b="1" i="0">
+                <a:solidFill>
+                  <a:srgbClr val="E8801A"/>
+                </a:solidFill>
+                <a:latin typeface="Montserrat"/>
+              </a:rPr>
+              <a:t>PRUEBA BIEN HECHA</a:t>
+            </a:r>
+          </a:p>
+        </p:txBody>
+      </p:sp>
+      <p:sp>
+        <p:nvSpPr>
+          <p:cNvPr id="6" name="TextBox 5"/>
+          <p:cNvSpPr txBox="1"/>
+          <p:nvPr/>
+        </p:nvSpPr>
+        <p:spPr>
+          <a:xfrm>
+            <a:off x="822960" y="868680"/>
+            <a:ext cx="10515600" cy="914400"/>
+          </a:xfrm>
+          <a:prstGeom prst="rect">
+            <a:avLst/>
+          </a:prstGeom>
+          <a:noFill/>
+        </p:spPr>
+        <p:txBody>
+          <a:bodyPr wrap="square">
+            <a:spAutoFit/>
+          </a:bodyPr>
+          <a:lstStyle/>
+          <a:p>
+            <a:r>
+              <a:rPr sz="2800" b="1" i="0">
+                <a:solidFill>
+                  <a:srgbClr val="1E2761"/>
+                </a:solidFill>
+                <a:latin typeface="Montserrat"/>
+              </a:rPr>
+              <a:t>Manómetro fino y aparatos desmontados</a:t>
+            </a:r>
+          </a:p>
+        </p:txBody>
+      </p:sp>
+      <p:sp>
+        <p:nvSpPr>
+          <p:cNvPr id="7" name="Rounded Rectangle 6"/>
+          <p:cNvSpPr/>
+          <p:nvPr/>
+        </p:nvSpPr>
+        <p:spPr>
+          <a:xfrm>
+            <a:off x="868680" y="1627632"/>
+            <a:ext cx="2011680" cy="73152"/>
+          </a:xfrm>
+          <a:prstGeom prst="roundRect">
+            <a:avLst/>
+          </a:prstGeom>
+          <a:solidFill>
+            <a:srgbClr val="E8801A"/>
+          </a:solidFill>
+          <a:ln>
+            <a:noFill/>
+          </a:ln>
+          <a:effectLst/>
+        </p:spPr>
+        <p:style>
+          <a:lnRef idx="1">
+            <a:schemeClr val="accent1"/>
+          </a:lnRef>
+          <a:fillRef idx="3">
+            <a:schemeClr val="accent1"/>
+          </a:fillRef>
+          <a:effectRef idx="2">
+            <a:schemeClr val="accent1"/>
+          </a:effectRef>
+          <a:fontRef idx="minor">
+            <a:schemeClr val="lt1"/>
+          </a:fontRef>
+        </p:style>
+        <p:txBody>
+          <a:bodyPr rtlCol="0" anchor="ctr"/>
+          <a:lstStyle/>
+          <a:p>
+            <a:pPr algn="ctr"/>
+          </a:p>
+        </p:txBody>
+      </p:sp>
+      <p:sp>
+        <p:nvSpPr>
+          <p:cNvPr id="8" name="TextBox 7"/>
+          <p:cNvSpPr txBox="1"/>
+          <p:nvPr/>
+        </p:nvSpPr>
+        <p:spPr>
+          <a:xfrm>
+            <a:off x="822960" y="1965960"/>
+            <a:ext cx="4983480" cy="4206240"/>
+          </a:xfrm>
+          <a:prstGeom prst="rect">
+            <a:avLst/>
+          </a:prstGeom>
+          <a:noFill/>
+        </p:spPr>
+        <p:txBody>
+          <a:bodyPr wrap="square">
+            <a:spAutoFit/>
+          </a:bodyPr>
+          <a:lstStyle/>
+          <a:p>
+            <a:pPr>
+              <a:spcAft>
+                <a:spcPts val="1100"/>
+              </a:spcAft>
+            </a:pPr>
+            <a:r>
+              <a:rPr sz="1600" b="1" i="0">
+                <a:solidFill>
+                  <a:srgbClr val="E8801A"/>
+                </a:solidFill>
+                <a:latin typeface="Montserrat"/>
+              </a:rPr>
+              <a:t>▸  </a:t>
+            </a:r>
+            <a:r>
+              <a:rPr sz="1600" b="0" i="0">
+                <a:solidFill>
+                  <a:srgbClr val="1B2330"/>
+                </a:solidFill>
+                <a:latin typeface="Montserrat"/>
+              </a:rPr>
+              <a:t>Aguja entre 35 % y 75 %</a:t>
+            </a:r>
+          </a:p>
+          <a:p>
+            <a:pPr>
+              <a:spcAft>
+                <a:spcPts val="1100"/>
+              </a:spcAft>
+            </a:pPr>
+            <a:r>
+              <a:rPr sz="1600" b="1" i="0">
+                <a:solidFill>
+                  <a:srgbClr val="E8801A"/>
+                </a:solidFill>
+                <a:latin typeface="Montserrat"/>
+              </a:rPr>
+              <a:t>▸  </a:t>
+            </a:r>
+            <a:r>
+              <a:rPr sz="1600" b="0" i="0">
+                <a:solidFill>
+                  <a:srgbClr val="1B2330"/>
+                </a:solidFill>
+                <a:latin typeface="Montserrat"/>
+              </a:rPr>
+              <a:t>Baja presión: columna de agua en U</a:t>
+            </a:r>
+          </a:p>
+          <a:p>
+            <a:pPr>
+              <a:spcAft>
+                <a:spcPts val="1100"/>
+              </a:spcAft>
+            </a:pPr>
+            <a:r>
+              <a:rPr sz="1600" b="1" i="0">
+                <a:solidFill>
+                  <a:srgbClr val="E8801A"/>
+                </a:solidFill>
+                <a:latin typeface="Montserrat"/>
+              </a:rPr>
+              <a:t>▸  </a:t>
+            </a:r>
+            <a:r>
+              <a:rPr sz="1600" b="0" i="0">
+                <a:solidFill>
+                  <a:srgbClr val="1B2330"/>
+                </a:solidFill>
+                <a:latin typeface="Montserrat"/>
+              </a:rPr>
+              <a:t>Desmonta electroválvulas y filtros</a:t>
+            </a:r>
+          </a:p>
+          <a:p>
+            <a:pPr>
+              <a:spcAft>
+                <a:spcPts val="1100"/>
+              </a:spcAft>
+            </a:pPr>
+            <a:r>
+              <a:rPr sz="1600" b="1" i="0">
+                <a:solidFill>
+                  <a:srgbClr val="E8801A"/>
+                </a:solidFill>
+                <a:latin typeface="Montserrat"/>
+              </a:rPr>
+              <a:t>▸  </a:t>
+            </a:r>
+            <a:r>
+              <a:rPr sz="1600" b="0" i="0">
+                <a:solidFill>
+                  <a:srgbClr val="1B2330"/>
+                </a:solidFill>
+                <a:latin typeface="Montserrat"/>
+              </a:rPr>
+              <a:t>Recomprueba a la MOP con todo montado</a:t>
+            </a:r>
+          </a:p>
+        </p:txBody>
+      </p:sp>
+      <p:sp>
+        <p:nvSpPr>
+          <p:cNvPr id="9" name="imgph" descr="IMGQ:U tube water column manometer"/>
+          <p:cNvSpPr/>
+          <p:nvPr/>
+        </p:nvSpPr>
+        <p:spPr>
+          <a:xfrm>
+            <a:off x="5806440" y="1051560"/>
+            <a:ext cx="5298947" cy="4629150"/>
+          </a:xfrm>
+          <a:prstGeom prst="roundRect">
+            <a:avLst/>
+          </a:prstGeom>
+          <a:solidFill>
+            <a:srgbClr val="F3F6FB"/>
+          </a:solidFill>
+          <a:ln w="12700">
+            <a:solidFill>
+              <a:srgbClr val="C7D2E6"/>
+            </a:solidFill>
+          </a:ln>
+          <a:effectLst/>
+        </p:spPr>
+        <p:style>
+          <a:lnRef idx="1">
+            <a:schemeClr val="accent1"/>
+          </a:lnRef>
+          <a:fillRef idx="3">
+            <a:schemeClr val="accent1"/>
+          </a:fillRef>
+          <a:effectRef idx="2">
+            <a:schemeClr val="accent1"/>
+          </a:effectRef>
+          <a:fontRef idx="minor">
+            <a:schemeClr val="lt1"/>
+          </a:fontRef>
+        </p:style>
+        <p:txBody>
+          <a:bodyPr rtlCol="0" anchor="ctr"/>
+          <a:lstStyle/>
+          <a:p>
+            <a:pPr algn="ctr"/>
+          </a:p>
+        </p:txBody>
+      </p:sp>
+      <p:sp>
+        <p:nvSpPr>
+          <p:cNvPr id="10" name="TextBox 9"/>
+          <p:cNvSpPr txBox="1"/>
+          <p:nvPr/>
+        </p:nvSpPr>
+        <p:spPr>
+          <a:xfrm>
+            <a:off x="6080760" y="2726055"/>
+            <a:ext cx="4750307" cy="1280160"/>
+          </a:xfrm>
+          <a:prstGeom prst="rect">
+            <a:avLst/>
+          </a:prstGeom>
+          <a:noFill/>
+        </p:spPr>
+        <p:txBody>
+          <a:bodyPr wrap="square">
+            <a:spAutoFit/>
+          </a:bodyPr>
+          <a:lstStyle/>
+          <a:p>
+            <a:pPr algn="ctr"/>
+            <a:r>
+              <a:rPr sz="1400" b="1" i="0">
+                <a:solidFill>
+                  <a:srgbClr val="64748B"/>
+                </a:solidFill>
+                <a:latin typeface="Montserrat"/>
+              </a:rPr>
+              <a:t>IMAGEN REALISTA</a:t>
+            </a:r>
+          </a:p>
+          <a:p>
+            <a:pPr algn="ctr"/>
+            <a:r>
+              <a:rPr sz="1100" b="0" i="1">
+                <a:solidFill>
+                  <a:srgbClr val="64748B"/>
+                </a:solidFill>
+                <a:latin typeface="Montserrat"/>
+              </a:rPr>
+              <a:t>U tube water column manometer</a:t>
+            </a:r>
+          </a:p>
+        </p:txBody>
+      </p:sp>
+    </p:spTree>
+  </p:cSld>
+  <p:clrMapOvr>
+    <a:masterClrMapping/>
+  </p:clrMapOvr>
+</p:sld>
+</file>
+
+<file path=ppt/slides/slide17.xml><?xml version="1.0" encoding="utf-8"?>
+<p:sld xmlns:a="http://schemas.openxmlformats.org/drawingml/2006/main" xmlns:p="http://schemas.openxmlformats.org/presentationml/2006/main" xmlns:r="http://schemas.openxmlformats.org/officeDocument/2006/relationships">
+  <p:cSld>
+    <p:spTree>
+      <p:nvGrpSpPr>
+        <p:cNvPr id="1" name=""/>
+        <p:cNvGrpSpPr/>
+        <p:nvPr/>
+      </p:nvGrpSpPr>
+      <p:grpSpPr/>
+      <p:sp>
+        <p:nvSpPr>
+          <p:cNvPr id="2" name="Rectangle 1"/>
+          <p:cNvSpPr/>
+          <p:nvPr/>
+        </p:nvSpPr>
+        <p:spPr>
+          <a:xfrm>
+            <a:off x="0" y="0"/>
+            <a:ext cx="12191695" cy="6858000"/>
+          </a:xfrm>
+          <a:prstGeom prst="rect">
+            <a:avLst/>
+          </a:prstGeom>
+          <a:solidFill>
             <a:srgbClr val="1E2761"/>
           </a:solidFill>
           <a:ln>
@@ -7387,7 +8221,7 @@
             <a:r>
               <a:rPr sz="1400" b="1" i="0">
                 <a:solidFill>
-                  <a:srgbClr val="CADCFC"/>
+                  <a:srgbClr val="F4A24C"/>
                 </a:solidFill>
                 <a:latin typeface="Montserrat"/>
               </a:rPr>
@@ -7398,13 +8232,57 @@
       </p:sp>
       <p:sp>
         <p:nvSpPr>
-          <p:cNvPr id="4" name="TextBox 3"/>
+          <p:cNvPr id="4" name="Rounded Rectangle 3"/>
+          <p:cNvSpPr/>
+          <p:nvPr/>
+        </p:nvSpPr>
+        <p:spPr>
+          <a:xfrm>
+            <a:off x="868680" y="1051560"/>
+            <a:ext cx="1463040" cy="82296"/>
+          </a:xfrm>
+          <a:prstGeom prst="roundRect">
+            <a:avLst/>
+          </a:prstGeom>
+          <a:solidFill>
+            <a:srgbClr val="E8801A"/>
+          </a:solidFill>
+          <a:ln>
+            <a:noFill/>
+          </a:ln>
+          <a:effectLst/>
+        </p:spPr>
+        <p:style>
+          <a:lnRef idx="1">
+            <a:schemeClr val="accent1"/>
+          </a:lnRef>
+          <a:fillRef idx="3">
+            <a:schemeClr val="accent1"/>
+          </a:fillRef>
+          <a:effectRef idx="2">
+            <a:schemeClr val="accent1"/>
+          </a:effectRef>
+          <a:fontRef idx="minor">
+            <a:schemeClr val="lt1"/>
+          </a:fontRef>
+        </p:style>
+        <p:txBody>
+          <a:bodyPr rtlCol="0" anchor="ctr"/>
+          <a:lstStyle/>
+          <a:p>
+            <a:pPr algn="ctr"/>
+          </a:p>
+        </p:txBody>
+      </p:sp>
+      <p:sp>
+        <p:nvSpPr>
+          <p:cNvPr id="5" name="TextBox 4"/>
           <p:cNvSpPr txBox="1"/>
           <p:nvPr/>
         </p:nvSpPr>
         <p:spPr>
           <a:xfrm>
-            <a:off x="822960" y="1143000"/>
+            <a:off x="822960" y="1234440"/>
             <a:ext cx="10515600" cy="1097280"/>
           </a:xfrm>
           <a:prstGeom prst="rect">
@@ -7432,14 +8310,14 @@
       </p:sp>
       <p:sp>
         <p:nvSpPr>
-          <p:cNvPr id="5" name="TextBox 4"/>
+          <p:cNvPr id="6" name="TextBox 5"/>
           <p:cNvSpPr txBox="1"/>
           <p:nvPr/>
         </p:nvSpPr>
         <p:spPr>
           <a:xfrm>
-            <a:off x="822960" y="2514600"/>
-            <a:ext cx="10515600" cy="2834640"/>
+            <a:off x="822960" y="2606040"/>
+            <a:ext cx="10515600" cy="2743200"/>
           </a:xfrm>
           <a:prstGeom prst="rect">
             <a:avLst/>
@@ -7460,7 +8338,7 @@
             <a:r>
               <a:rPr sz="2000" b="1" i="0">
                 <a:solidFill>
-                  <a:srgbClr val="CADCFC"/>
+                  <a:srgbClr val="F4A24C"/>
                 </a:solidFill>
                 <a:latin typeface="Montserrat"/>
               </a:rPr>
@@ -7485,7 +8363,7 @@
             <a:r>
               <a:rPr sz="2000" b="1" i="0">
                 <a:solidFill>
-                  <a:srgbClr val="CADCFC"/>
+                  <a:srgbClr val="F4A24C"/>
                 </a:solidFill>
                 <a:latin typeface="Montserrat"/>
               </a:rPr>
@@ -7510,7 +8388,7 @@
             <a:r>
               <a:rPr sz="2000" b="1" i="0">
                 <a:solidFill>
-                  <a:srgbClr val="CADCFC"/>
+                  <a:srgbClr val="F4A24C"/>
                 </a:solidFill>
                 <a:latin typeface="Montserrat"/>
               </a:rPr>
@@ -7535,7 +8413,7 @@
             <a:r>
               <a:rPr sz="2000" b="1" i="0">
                 <a:solidFill>
-                  <a:srgbClr val="CADCFC"/>
+                  <a:srgbClr val="F4A24C"/>
                 </a:solidFill>
                 <a:latin typeface="Montserrat"/>
               </a:rPr>
@@ -7555,20 +8433,20 @@
       </p:sp>
       <p:sp>
         <p:nvSpPr>
-          <p:cNvPr id="6" name="Rounded Rectangle 5"/>
+          <p:cNvPr id="7" name="Rounded Rectangle 6"/>
           <p:cNvSpPr/>
           <p:nvPr/>
         </p:nvSpPr>
         <p:spPr>
           <a:xfrm>
             <a:off x="822960" y="5532120"/>
-            <a:ext cx="10515600" cy="777240"/>
+            <a:ext cx="10515600" cy="822960"/>
           </a:xfrm>
           <a:prstGeom prst="roundRect">
             <a:avLst/>
           </a:prstGeom>
           <a:solidFill>
-            <a:srgbClr val="2E3A80"/>
+            <a:srgbClr val="E8801A"/>
           </a:solidFill>
           <a:ln>
             <a:noFill/>
@@ -7599,13 +8477,13 @@
       </p:sp>
       <p:sp>
         <p:nvSpPr>
-          <p:cNvPr id="7" name="TextBox 6"/>
+          <p:cNvPr id="8" name="TextBox 7"/>
           <p:cNvSpPr txBox="1"/>
           <p:nvPr/>
         </p:nvSpPr>
         <p:spPr>
           <a:xfrm>
-            <a:off x="1051560" y="5605272"/>
+            <a:off x="1051560" y="5623560"/>
             <a:ext cx="10058400" cy="640080"/>
           </a:xfrm>
           <a:prstGeom prst="rect">
@@ -7622,7 +8500,7 @@
             <a:r>
               <a:rPr sz="1500" b="1" i="1">
                 <a:solidFill>
-                  <a:srgbClr val="CADCFC"/>
+                  <a:srgbClr val="1E2761"/>
                 </a:solidFill>
                 <a:latin typeface="Montserrat"/>
               </a:rPr>
@@ -7723,7 +8601,7 @@
                 </a:solidFill>
                 <a:latin typeface="Montserrat"/>
               </a:rPr>
-              <a:t>002 / 016</a:t>
+              <a:t>002 / 017</a:t>
             </a:r>
           </a:p>
         </p:txBody>
@@ -7787,7 +8665,7 @@
             <a:r>
               <a:rPr sz="2700" b="1" i="0">
                 <a:solidFill>
-                  <a:srgbClr val="1E2761"/>
+                  <a:srgbClr val="E8801A"/>
                 </a:solidFill>
                 <a:latin typeface="Montserrat"/>
               </a:rPr>
@@ -7799,6 +8677,50 @@
       <p:sp>
         <p:nvSpPr>
           <p:cNvPr id="6" name="Rounded Rectangle 5"/>
+          <p:cNvSpPr/>
+          <p:nvPr/>
+        </p:nvSpPr>
+        <p:spPr>
+          <a:xfrm>
+            <a:off x="868680" y="1234440"/>
+            <a:ext cx="1463040" cy="73152"/>
+          </a:xfrm>
+          <a:prstGeom prst="roundRect">
+            <a:avLst/>
+          </a:prstGeom>
+          <a:solidFill>
+            <a:srgbClr val="1E2761"/>
+          </a:solidFill>
+          <a:ln>
+            <a:noFill/>
+          </a:ln>
+          <a:effectLst/>
+        </p:spPr>
+        <p:style>
+          <a:lnRef idx="1">
+            <a:schemeClr val="accent1"/>
+          </a:lnRef>
+          <a:fillRef idx="3">
+            <a:schemeClr val="accent1"/>
+          </a:fillRef>
+          <a:effectRef idx="2">
+            <a:schemeClr val="accent1"/>
+          </a:effectRef>
+          <a:fontRef idx="minor">
+            <a:schemeClr val="lt1"/>
+          </a:fontRef>
+        </p:style>
+        <p:txBody>
+          <a:bodyPr rtlCol="0" anchor="ctr"/>
+          <a:lstStyle/>
+          <a:p>
+            <a:pPr algn="ctr"/>
+          </a:p>
+        </p:txBody>
+      </p:sp>
+      <p:sp>
+        <p:nvSpPr>
+          <p:cNvPr id="7" name="Rounded Rectangle 6"/>
           <p:cNvSpPr/>
           <p:nvPr/>
         </p:nvSpPr>
@@ -7844,7 +8766,7 @@
       </p:sp>
       <p:sp>
         <p:nvSpPr>
-          <p:cNvPr id="7" name="TextBox 6"/>
+          <p:cNvPr id="8" name="TextBox 7"/>
           <p:cNvSpPr txBox="1"/>
           <p:nvPr/>
         </p:nvSpPr>
@@ -7879,7 +8801,7 @@
       </p:sp>
       <p:sp>
         <p:nvSpPr>
-          <p:cNvPr id="8" name="TextBox 7"/>
+          <p:cNvPr id="9" name="TextBox 8"/>
           <p:cNvSpPr txBox="1"/>
           <p:nvPr/>
         </p:nvSpPr>
@@ -7914,7 +8836,7 @@
       </p:sp>
       <p:sp>
         <p:nvSpPr>
-          <p:cNvPr id="9" name="Rounded Rectangle 8"/>
+          <p:cNvPr id="10" name="Rounded Rectangle 9"/>
           <p:cNvSpPr/>
           <p:nvPr/>
         </p:nvSpPr>
@@ -7960,7 +8882,7 @@
       </p:sp>
       <p:sp>
         <p:nvSpPr>
-          <p:cNvPr id="10" name="TextBox 9"/>
+          <p:cNvPr id="11" name="TextBox 10"/>
           <p:cNvSpPr txBox="1"/>
           <p:nvPr/>
         </p:nvSpPr>
@@ -7995,7 +8917,7 @@
       </p:sp>
       <p:sp>
         <p:nvSpPr>
-          <p:cNvPr id="11" name="TextBox 10"/>
+          <p:cNvPr id="12" name="TextBox 11"/>
           <p:cNvSpPr txBox="1"/>
           <p:nvPr/>
         </p:nvSpPr>
@@ -8030,7 +8952,7 @@
       </p:sp>
       <p:sp>
         <p:nvSpPr>
-          <p:cNvPr id="12" name="Rounded Rectangle 11"/>
+          <p:cNvPr id="13" name="Rounded Rectangle 12"/>
           <p:cNvSpPr/>
           <p:nvPr/>
         </p:nvSpPr>
@@ -8076,7 +8998,7 @@
       </p:sp>
       <p:sp>
         <p:nvSpPr>
-          <p:cNvPr id="13" name="TextBox 12"/>
+          <p:cNvPr id="14" name="TextBox 13"/>
           <p:cNvSpPr txBox="1"/>
           <p:nvPr/>
         </p:nvSpPr>
@@ -8111,7 +9033,7 @@
       </p:sp>
       <p:sp>
         <p:nvSpPr>
-          <p:cNvPr id="14" name="TextBox 13"/>
+          <p:cNvPr id="15" name="TextBox 14"/>
           <p:cNvSpPr txBox="1"/>
           <p:nvPr/>
         </p:nvSpPr>
@@ -8236,7 +9158,7 @@
                 </a:solidFill>
                 <a:latin typeface="Montserrat"/>
               </a:rPr>
-              <a:t>003 / 016</a:t>
+              <a:t>003 / 017</a:t>
             </a:r>
           </a:p>
         </p:txBody>
@@ -8283,7 +9205,7 @@
         </p:nvSpPr>
         <p:spPr>
           <a:xfrm>
-            <a:off x="822960" y="457200"/>
+            <a:off x="822960" y="502920"/>
             <a:ext cx="8229600" cy="365760"/>
           </a:xfrm>
           <a:prstGeom prst="rect">
@@ -8298,13 +9220,13 @@
           <a:lstStyle/>
           <a:p>
             <a:r>
-              <a:rPr sz="1200" b="1" i="0">
-                <a:solidFill>
-                  <a:srgbClr val="64748B"/>
-                </a:solidFill>
-                <a:latin typeface="Montserrat"/>
-              </a:rPr>
-              <a:t>TRAZADO DE TUBERÍAS</a:t>
+              <a:rPr sz="1300" b="1" i="0">
+                <a:solidFill>
+                  <a:srgbClr val="E8801A"/>
+                </a:solidFill>
+                <a:latin typeface="Montserrat"/>
+              </a:rPr>
+              <a:t>PARTES DE ESTE VÍDEO</a:t>
             </a:r>
           </a:p>
         </p:txBody>
@@ -8317,7 +9239,7 @@
         </p:nvSpPr>
         <p:spPr>
           <a:xfrm>
-            <a:off x="822960" y="868680"/>
+            <a:off x="822960" y="914400"/>
             <a:ext cx="10515600" cy="914400"/>
           </a:xfrm>
           <a:prstGeom prst="rect">
@@ -8338,155 +9260,30 @@
                 </a:solidFill>
                 <a:latin typeface="Montserrat"/>
               </a:rPr>
-              <a:t>El «3 cm para todo»</a:t>
-            </a:r>
-          </a:p>
-        </p:txBody>
-      </p:sp>
-      <p:sp>
-        <p:nvSpPr>
-          <p:cNvPr id="7" name="TextBox 6"/>
-          <p:cNvSpPr txBox="1"/>
-          <p:nvPr/>
-        </p:nvSpPr>
-        <p:spPr>
-          <a:xfrm>
-            <a:off x="822960" y="1920240"/>
-            <a:ext cx="4983480" cy="4206240"/>
-          </a:xfrm>
-          <a:prstGeom prst="rect">
-            <a:avLst/>
-          </a:prstGeom>
-          <a:noFill/>
-        </p:spPr>
-        <p:txBody>
-          <a:bodyPr wrap="square">
-            <a:spAutoFit/>
-          </a:bodyPr>
-          <a:lstStyle/>
-          <a:p>
-            <a:pPr>
-              <a:spcAft>
-                <a:spcPts val="1000"/>
-              </a:spcAft>
-            </a:pPr>
-            <a:r>
-              <a:rPr sz="1600" b="1" i="0">
-                <a:solidFill>
-                  <a:srgbClr val="2E3A80"/>
-                </a:solidFill>
-                <a:latin typeface="Montserrat"/>
-              </a:rPr>
-              <a:t>•  </a:t>
-            </a:r>
-            <a:r>
-              <a:rPr sz="1600" b="0" i="0">
-                <a:solidFill>
-                  <a:srgbClr val="1B2330"/>
-                </a:solidFill>
-                <a:latin typeface="Montserrat"/>
-              </a:rPr>
-              <a:t>Tubería fijada a elementos sólidos</a:t>
-            </a:r>
-          </a:p>
-          <a:p>
-            <a:pPr>
-              <a:spcAft>
-                <a:spcPts val="1000"/>
-              </a:spcAft>
-            </a:pPr>
-            <a:r>
-              <a:rPr sz="1600" b="1" i="0">
-                <a:solidFill>
-                  <a:srgbClr val="2E3A80"/>
-                </a:solidFill>
-                <a:latin typeface="Montserrat"/>
-              </a:rPr>
-              <a:t>•  </a:t>
-            </a:r>
-            <a:r>
-              <a:rPr sz="1600" b="0" i="0">
-                <a:solidFill>
-                  <a:srgbClr val="1B2330"/>
-                </a:solidFill>
-                <a:latin typeface="Montserrat"/>
-              </a:rPr>
-              <a:t>3 cm a agua, electricidad y vapor</a:t>
-            </a:r>
-          </a:p>
-          <a:p>
-            <a:pPr>
-              <a:spcAft>
-                <a:spcPts val="1000"/>
-              </a:spcAft>
-            </a:pPr>
-            <a:r>
-              <a:rPr sz="1600" b="1" i="0">
-                <a:solidFill>
-                  <a:srgbClr val="2E3A80"/>
-                </a:solidFill>
-                <a:latin typeface="Montserrat"/>
-              </a:rPr>
-              <a:t>•  </a:t>
-            </a:r>
-            <a:r>
-              <a:rPr sz="1600" b="0" i="0">
-                <a:solidFill>
-                  <a:srgbClr val="1B2330"/>
-                </a:solidFill>
-                <a:latin typeface="Montserrat"/>
-              </a:rPr>
-              <a:t>3 cm a chimeneas y al suelo</a:t>
-            </a:r>
-          </a:p>
-          <a:p>
-            <a:pPr>
-              <a:spcAft>
-                <a:spcPts val="1000"/>
-              </a:spcAft>
-            </a:pPr>
-            <a:r>
-              <a:rPr sz="1600" b="1" i="0">
-                <a:solidFill>
-                  <a:srgbClr val="2E3A80"/>
-                </a:solidFill>
-                <a:latin typeface="Montserrat"/>
-              </a:rPr>
-              <a:t>•  </a:t>
-            </a:r>
-            <a:r>
-              <a:rPr sz="1600" b="0" i="0">
-                <a:solidFill>
-                  <a:srgbClr val="1B2330"/>
-                </a:solidFill>
-                <a:latin typeface="Montserrat"/>
-              </a:rPr>
-              <a:t>Si no llegas: protege el tubo</a:t>
-            </a:r>
-          </a:p>
-        </p:txBody>
-      </p:sp>
-      <p:sp>
-        <p:nvSpPr>
-          <p:cNvPr id="8" name="imgph" descr="IMGQ:copper gas pipe on wall with clamps"/>
+              <a:t>En este vídeo</a:t>
+            </a:r>
+          </a:p>
+        </p:txBody>
+      </p:sp>
+      <p:sp>
+        <p:nvSpPr>
+          <p:cNvPr id="7" name="Rounded Rectangle 6"/>
           <p:cNvSpPr/>
           <p:nvPr/>
         </p:nvSpPr>
         <p:spPr>
           <a:xfrm>
-            <a:off x="5806440" y="1051560"/>
-            <a:ext cx="5298947" cy="4629150"/>
+            <a:off x="868680" y="1673352"/>
+            <a:ext cx="2011680" cy="73152"/>
           </a:xfrm>
           <a:prstGeom prst="roundRect">
             <a:avLst/>
           </a:prstGeom>
           <a:solidFill>
-            <a:srgbClr val="F3F6FB"/>
+            <a:srgbClr val="E8801A"/>
           </a:solidFill>
-          <a:ln w="12700">
-            <a:solidFill>
-              <a:srgbClr val="C7D2E6"/>
-            </a:solidFill>
+          <a:ln>
+            <a:noFill/>
           </a:ln>
           <a:effectLst/>
         </p:spPr>
@@ -8514,14 +9311,14 @@
       </p:sp>
       <p:sp>
         <p:nvSpPr>
-          <p:cNvPr id="9" name="TextBox 8"/>
+          <p:cNvPr id="8" name="TextBox 7"/>
           <p:cNvSpPr txBox="1"/>
           <p:nvPr/>
         </p:nvSpPr>
         <p:spPr>
           <a:xfrm>
-            <a:off x="6080760" y="2726055"/>
-            <a:ext cx="4750307" cy="1280160"/>
+            <a:off x="822960" y="2103120"/>
+            <a:ext cx="10515600" cy="4023360"/>
           </a:xfrm>
           <a:prstGeom prst="rect">
             <a:avLst/>
@@ -8534,27 +9331,228 @@
           </a:bodyPr>
           <a:lstStyle/>
           <a:p>
-            <a:pPr algn="ctr"/>
-            <a:r>
-              <a:rPr sz="1400" b="1" i="0">
-                <a:solidFill>
-                  <a:srgbClr val="64748B"/>
-                </a:solidFill>
-                <a:latin typeface="Montserrat"/>
-              </a:rPr>
-              <a:t>IMAGEN REALISTA</a:t>
-            </a:r>
-          </a:p>
-          <a:p>
-            <a:pPr algn="ctr"/>
-            <a:r>
-              <a:rPr sz="1100" b="0" i="1">
-                <a:solidFill>
-                  <a:srgbClr val="64748B"/>
-                </a:solidFill>
-                <a:latin typeface="Montserrat"/>
-              </a:rPr>
-              <a:t>copper gas pipe on wall with clamps</a:t>
+            <a:pPr>
+              <a:spcAft>
+                <a:spcPts val="900"/>
+              </a:spcAft>
+            </a:pPr>
+            <a:r>
+              <a:rPr sz="1800" b="1" i="0">
+                <a:solidFill>
+                  <a:srgbClr val="E8801A"/>
+                </a:solidFill>
+                <a:latin typeface="Montserrat"/>
+              </a:rPr>
+              <a:t>01   </a:t>
+            </a:r>
+            <a:r>
+              <a:rPr sz="1700" b="0" i="0">
+                <a:solidFill>
+                  <a:srgbClr val="1B2330"/>
+                </a:solidFill>
+                <a:latin typeface="Montserrat"/>
+              </a:rPr>
+              <a:t>Trazado de tuberías</a:t>
+            </a:r>
+          </a:p>
+          <a:p>
+            <a:pPr>
+              <a:spcAft>
+                <a:spcPts val="900"/>
+              </a:spcAft>
+            </a:pPr>
+            <a:r>
+              <a:rPr sz="1800" b="1" i="0">
+                <a:solidFill>
+                  <a:srgbClr val="E8801A"/>
+                </a:solidFill>
+                <a:latin typeface="Montserrat"/>
+              </a:rPr>
+              <a:t>02   </a:t>
+            </a:r>
+            <a:r>
+              <a:rPr sz="1700" b="0" i="0">
+                <a:solidFill>
+                  <a:srgbClr val="1B2330"/>
+                </a:solidFill>
+                <a:latin typeface="Montserrat"/>
+              </a:rPr>
+              <a:t>Materiales y accesorios</a:t>
+            </a:r>
+          </a:p>
+          <a:p>
+            <a:pPr>
+              <a:spcAft>
+                <a:spcPts val="900"/>
+              </a:spcAft>
+            </a:pPr>
+            <a:r>
+              <a:rPr sz="1800" b="1" i="0">
+                <a:solidFill>
+                  <a:srgbClr val="E8801A"/>
+                </a:solidFill>
+                <a:latin typeface="Montserrat"/>
+              </a:rPr>
+              <a:t>03   </a:t>
+            </a:r>
+            <a:r>
+              <a:rPr sz="1700" b="0" i="0">
+                <a:solidFill>
+                  <a:srgbClr val="1B2330"/>
+                </a:solidFill>
+                <a:latin typeface="Montserrat"/>
+              </a:rPr>
+              <a:t>Materiales y normas</a:t>
+            </a:r>
+          </a:p>
+          <a:p>
+            <a:pPr>
+              <a:spcAft>
+                <a:spcPts val="900"/>
+              </a:spcAft>
+            </a:pPr>
+            <a:r>
+              <a:rPr sz="1800" b="1" i="0">
+                <a:solidFill>
+                  <a:srgbClr val="E8801A"/>
+                </a:solidFill>
+                <a:latin typeface="Montserrat"/>
+              </a:rPr>
+              <a:t>04   </a:t>
+            </a:r>
+            <a:r>
+              <a:rPr sz="1700" b="0" i="0">
+                <a:solidFill>
+                  <a:srgbClr val="1B2330"/>
+                </a:solidFill>
+                <a:latin typeface="Montserrat"/>
+              </a:rPr>
+              <a:t>Tipos de tubería</a:t>
+            </a:r>
+          </a:p>
+          <a:p>
+            <a:pPr>
+              <a:spcAft>
+                <a:spcPts val="900"/>
+              </a:spcAft>
+            </a:pPr>
+            <a:r>
+              <a:rPr sz="1800" b="1" i="0">
+                <a:solidFill>
+                  <a:srgbClr val="E8801A"/>
+                </a:solidFill>
+                <a:latin typeface="Montserrat"/>
+              </a:rPr>
+              <a:t>05   </a:t>
+            </a:r>
+            <a:r>
+              <a:rPr sz="1700" b="0" i="0">
+                <a:solidFill>
+                  <a:srgbClr val="1B2330"/>
+                </a:solidFill>
+                <a:latin typeface="Montserrat"/>
+              </a:rPr>
+              <a:t>Uniones mecánicas</a:t>
+            </a:r>
+          </a:p>
+          <a:p>
+            <a:pPr>
+              <a:spcAft>
+                <a:spcPts val="900"/>
+              </a:spcAft>
+            </a:pPr>
+            <a:r>
+              <a:rPr sz="1800" b="1" i="0">
+                <a:solidFill>
+                  <a:srgbClr val="E8801A"/>
+                </a:solidFill>
+                <a:latin typeface="Montserrat"/>
+              </a:rPr>
+              <a:t>06   </a:t>
+            </a:r>
+            <a:r>
+              <a:rPr sz="1700" b="0" i="0">
+                <a:solidFill>
+                  <a:srgbClr val="1B2330"/>
+                </a:solidFill>
+                <a:latin typeface="Montserrat"/>
+              </a:rPr>
+              <a:t>Tubo multicapa</a:t>
+            </a:r>
+          </a:p>
+          <a:p>
+            <a:pPr>
+              <a:spcAft>
+                <a:spcPts val="900"/>
+              </a:spcAft>
+            </a:pPr>
+            <a:r>
+              <a:rPr sz="1800" b="1" i="0">
+                <a:solidFill>
+                  <a:srgbClr val="E8801A"/>
+                </a:solidFill>
+                <a:latin typeface="Montserrat"/>
+              </a:rPr>
+              <a:t>07   </a:t>
+            </a:r>
+            <a:r>
+              <a:rPr sz="1700" b="0" i="0">
+                <a:solidFill>
+                  <a:srgbClr val="1B2330"/>
+                </a:solidFill>
+                <a:latin typeface="Montserrat"/>
+              </a:rPr>
+              <a:t>Limitadores</a:t>
+            </a:r>
+          </a:p>
+          <a:p>
+            <a:pPr>
+              <a:spcAft>
+                <a:spcPts val="900"/>
+              </a:spcAft>
+            </a:pPr>
+            <a:r>
+              <a:rPr sz="1800" b="1" i="0">
+                <a:solidFill>
+                  <a:srgbClr val="E8801A"/>
+                </a:solidFill>
+                <a:latin typeface="Montserrat"/>
+              </a:rPr>
+              <a:t>08   </a:t>
+            </a:r>
+            <a:r>
+              <a:rPr sz="1700" b="0" i="0">
+                <a:solidFill>
+                  <a:srgbClr val="1B2330"/>
+                </a:solidFill>
+                <a:latin typeface="Montserrat"/>
+              </a:rPr>
+              <a:t>Vainas y conductos</a:t>
+            </a:r>
+          </a:p>
+          <a:p>
+            <a:pPr>
+              <a:spcAft>
+                <a:spcPts val="900"/>
+              </a:spcAft>
+            </a:pPr>
+            <a:r>
+              <a:rPr sz="1800" b="1" i="0">
+                <a:solidFill>
+                  <a:srgbClr val="E8801A"/>
+                </a:solidFill>
+                <a:latin typeface="Montserrat"/>
+              </a:rPr>
+              <a:t>09   </a:t>
+            </a:r>
+            <a:r>
+              <a:rPr sz="1700" b="0" i="0">
+                <a:solidFill>
+                  <a:srgbClr val="1B2330"/>
+                </a:solidFill>
+                <a:latin typeface="Montserrat"/>
+              </a:rPr>
+              <a:t>Prueba de estanqueidad</a:t>
             </a:r>
           </a:p>
         </p:txBody>
@@ -8651,7 +9649,7 @@
                 </a:solidFill>
                 <a:latin typeface="Montserrat"/>
               </a:rPr>
-              <a:t>004 / 016</a:t>
+              <a:t>004 / 017</a:t>
             </a:r>
           </a:p>
         </p:txBody>
@@ -8699,7 +9697,7 @@
         <p:spPr>
           <a:xfrm>
             <a:off x="822960" y="457200"/>
-            <a:ext cx="8229600" cy="365760"/>
+            <a:ext cx="10058400" cy="365760"/>
           </a:xfrm>
           <a:prstGeom prst="rect">
             <a:avLst/>
@@ -8713,9 +9711,9 @@
           <a:lstStyle/>
           <a:p>
             <a:r>
-              <a:rPr sz="1200" b="1" i="0">
-                <a:solidFill>
-                  <a:srgbClr val="64748B"/>
+              <a:rPr sz="1300" b="1" i="0">
+                <a:solidFill>
+                  <a:srgbClr val="E8801A"/>
                 </a:solidFill>
                 <a:latin typeface="Montserrat"/>
               </a:rPr>
@@ -8747,26 +9745,70 @@
           <a:lstStyle/>
           <a:p>
             <a:r>
-              <a:rPr sz="2700" b="1" i="0">
+              <a:rPr sz="2800" b="1" i="0">
                 <a:solidFill>
                   <a:srgbClr val="1E2761"/>
                 </a:solidFill>
                 <a:latin typeface="Montserrat"/>
               </a:rPr>
-              <a:t>Por dónde no pasa el tubo de gas</a:t>
-            </a:r>
-          </a:p>
-        </p:txBody>
-      </p:sp>
-      <p:sp>
-        <p:nvSpPr>
-          <p:cNvPr id="7" name="TextBox 6"/>
+              <a:t>El «3 cm para todo»</a:t>
+            </a:r>
+          </a:p>
+        </p:txBody>
+      </p:sp>
+      <p:sp>
+        <p:nvSpPr>
+          <p:cNvPr id="7" name="Rounded Rectangle 6"/>
+          <p:cNvSpPr/>
+          <p:nvPr/>
+        </p:nvSpPr>
+        <p:spPr>
+          <a:xfrm>
+            <a:off x="868680" y="1627632"/>
+            <a:ext cx="2011680" cy="73152"/>
+          </a:xfrm>
+          <a:prstGeom prst="roundRect">
+            <a:avLst/>
+          </a:prstGeom>
+          <a:solidFill>
+            <a:srgbClr val="E8801A"/>
+          </a:solidFill>
+          <a:ln>
+            <a:noFill/>
+          </a:ln>
+          <a:effectLst/>
+        </p:spPr>
+        <p:style>
+          <a:lnRef idx="1">
+            <a:schemeClr val="accent1"/>
+          </a:lnRef>
+          <a:fillRef idx="3">
+            <a:schemeClr val="accent1"/>
+          </a:fillRef>
+          <a:effectRef idx="2">
+            <a:schemeClr val="accent1"/>
+          </a:effectRef>
+          <a:fontRef idx="minor">
+            <a:schemeClr val="lt1"/>
+          </a:fontRef>
+        </p:style>
+        <p:txBody>
+          <a:bodyPr rtlCol="0" anchor="ctr"/>
+          <a:lstStyle/>
+          <a:p>
+            <a:pPr algn="ctr"/>
+          </a:p>
+        </p:txBody>
+      </p:sp>
+      <p:sp>
+        <p:nvSpPr>
+          <p:cNvPr id="8" name="TextBox 7"/>
           <p:cNvSpPr txBox="1"/>
           <p:nvPr/>
         </p:nvSpPr>
         <p:spPr>
           <a:xfrm>
-            <a:off x="822960" y="1920240"/>
+            <a:off x="822960" y="1965960"/>
             <a:ext cx="4983480" cy="4206240"/>
           </a:xfrm>
           <a:prstGeom prst="rect">
@@ -8782,17 +9824,17 @@
           <a:p>
             <a:pPr>
               <a:spcAft>
-                <a:spcPts val="1000"/>
+                <a:spcPts val="1100"/>
               </a:spcAft>
             </a:pPr>
             <a:r>
               <a:rPr sz="1600" b="1" i="0">
                 <a:solidFill>
-                  <a:srgbClr val="2E3A80"/>
-                </a:solidFill>
-                <a:latin typeface="Montserrat"/>
-              </a:rPr>
-              <a:t>•  </a:t>
+                  <a:srgbClr val="E8801A"/>
+                </a:solidFill>
+                <a:latin typeface="Montserrat"/>
+              </a:rPr>
+              <a:t>▸  </a:t>
             </a:r>
             <a:r>
               <a:rPr sz="1600" b="0" i="0">
@@ -8801,23 +9843,23 @@
                 </a:solidFill>
                 <a:latin typeface="Montserrat"/>
               </a:rPr>
-              <a:t>Huecos de ascensor y montacargas</a:t>
+              <a:t>Tubería fijada a elementos sólidos</a:t>
             </a:r>
           </a:p>
           <a:p>
             <a:pPr>
               <a:spcAft>
-                <a:spcPts val="1000"/>
+                <a:spcPts val="1100"/>
               </a:spcAft>
             </a:pPr>
             <a:r>
               <a:rPr sz="1600" b="1" i="0">
                 <a:solidFill>
-                  <a:srgbClr val="2E3A80"/>
-                </a:solidFill>
-                <a:latin typeface="Montserrat"/>
-              </a:rPr>
-              <a:t>•  </a:t>
+                  <a:srgbClr val="E8801A"/>
+                </a:solidFill>
+                <a:latin typeface="Montserrat"/>
+              </a:rPr>
+              <a:t>▸  </a:t>
             </a:r>
             <a:r>
               <a:rPr sz="1600" b="0" i="0">
@@ -8826,23 +9868,23 @@
                 </a:solidFill>
                 <a:latin typeface="Montserrat"/>
               </a:rPr>
-              <a:t>Bajantes de basura y chimeneas</a:t>
+              <a:t>3 cm a agua, electricidad y vapor</a:t>
             </a:r>
           </a:p>
           <a:p>
             <a:pPr>
               <a:spcAft>
-                <a:spcPts val="1000"/>
+                <a:spcPts val="1100"/>
               </a:spcAft>
             </a:pPr>
             <a:r>
               <a:rPr sz="1600" b="1" i="0">
                 <a:solidFill>
-                  <a:srgbClr val="2E3A80"/>
-                </a:solidFill>
-                <a:latin typeface="Montserrat"/>
-              </a:rPr>
-              <a:t>•  </a:t>
+                  <a:srgbClr val="E8801A"/>
+                </a:solidFill>
+                <a:latin typeface="Montserrat"/>
+              </a:rPr>
+              <a:t>▸  </a:t>
             </a:r>
             <a:r>
               <a:rPr sz="1600" b="0" i="0">
@@ -8851,23 +9893,23 @@
                 </a:solidFill>
                 <a:latin typeface="Montserrat"/>
               </a:rPr>
-              <a:t>Transformadores y combustibles líquidos</a:t>
+              <a:t>3 cm a chimeneas y al suelo</a:t>
             </a:r>
           </a:p>
           <a:p>
             <a:pPr>
               <a:spcAft>
-                <a:spcPts val="1000"/>
+                <a:spcPts val="1100"/>
               </a:spcAft>
             </a:pPr>
             <a:r>
               <a:rPr sz="1600" b="1" i="0">
                 <a:solidFill>
-                  <a:srgbClr val="2E3A80"/>
-                </a:solidFill>
-                <a:latin typeface="Montserrat"/>
-              </a:rPr>
-              <a:t>•  </a:t>
+                  <a:srgbClr val="E8801A"/>
+                </a:solidFill>
+                <a:latin typeface="Montserrat"/>
+              </a:rPr>
+              <a:t>▸  </a:t>
             </a:r>
             <a:r>
               <a:rPr sz="1600" b="0" i="0">
@@ -8876,14 +9918,14 @@
                 </a:solidFill>
                 <a:latin typeface="Montserrat"/>
               </a:rPr>
-              <a:t>Bocas de ventilación (salvo envainado)</a:t>
-            </a:r>
-          </a:p>
-        </p:txBody>
-      </p:sp>
-      <p:sp>
-        <p:nvSpPr>
-          <p:cNvPr id="8" name="imgph" descr="IMGQ:elevator shaft inside building"/>
+              <a:t>Si no llegas: protege el tubo</a:t>
+            </a:r>
+          </a:p>
+        </p:txBody>
+      </p:sp>
+      <p:sp>
+        <p:nvSpPr>
+          <p:cNvPr id="9" name="imgph" descr="IMGQ:copper gas pipe on wall with clamps"/>
           <p:cNvSpPr/>
           <p:nvPr/>
         </p:nvSpPr>
@@ -8929,7 +9971,7 @@
       </p:sp>
       <p:sp>
         <p:nvSpPr>
-          <p:cNvPr id="9" name="TextBox 8"/>
+          <p:cNvPr id="10" name="TextBox 9"/>
           <p:cNvSpPr txBox="1"/>
           <p:nvPr/>
         </p:nvSpPr>
@@ -8969,7 +10011,7 @@
                 </a:solidFill>
                 <a:latin typeface="Montserrat"/>
               </a:rPr>
-              <a:t>elevator shaft inside building</a:t>
+              <a:t>copper gas pipe on wall with clamps</a:t>
             </a:r>
           </a:p>
         </p:txBody>
@@ -9066,7 +10108,7 @@
                 </a:solidFill>
                 <a:latin typeface="Montserrat"/>
               </a:rPr>
-              <a:t>005 / 016</a:t>
+              <a:t>005 / 017</a:t>
             </a:r>
           </a:p>
         </p:txBody>
@@ -9114,7 +10156,7 @@
         <p:spPr>
           <a:xfrm>
             <a:off x="822960" y="457200"/>
-            <a:ext cx="8229600" cy="365760"/>
+            <a:ext cx="10058400" cy="365760"/>
           </a:xfrm>
           <a:prstGeom prst="rect">
             <a:avLst/>
@@ -9128,13 +10170,13 @@
           <a:lstStyle/>
           <a:p>
             <a:r>
-              <a:rPr sz="1200" b="1" i="0">
-                <a:solidFill>
-                  <a:srgbClr val="64748B"/>
-                </a:solidFill>
-                <a:latin typeface="Montserrat"/>
-              </a:rPr>
-              <a:t>MATERIALES Y ACCESORIOS</a:t>
+              <a:rPr sz="1300" b="1" i="0">
+                <a:solidFill>
+                  <a:srgbClr val="E8801A"/>
+                </a:solidFill>
+                <a:latin typeface="Montserrat"/>
+              </a:rPr>
+              <a:t>TRAZADO DE TUBERÍAS</a:t>
             </a:r>
           </a:p>
         </p:txBody>
@@ -9162,26 +10204,70 @@
           <a:lstStyle/>
           <a:p>
             <a:r>
-              <a:rPr sz="2700" b="1" i="0">
+              <a:rPr sz="2800" b="1" i="0">
                 <a:solidFill>
                   <a:srgbClr val="1E2761"/>
                 </a:solidFill>
                 <a:latin typeface="Montserrat"/>
               </a:rPr>
-              <a:t>Soldadura: la frontera es la presión</a:t>
-            </a:r>
-          </a:p>
-        </p:txBody>
-      </p:sp>
-      <p:sp>
-        <p:nvSpPr>
-          <p:cNvPr id="7" name="TextBox 6"/>
+              <a:t>Por dónde no pasa el tubo de gas</a:t>
+            </a:r>
+          </a:p>
+        </p:txBody>
+      </p:sp>
+      <p:sp>
+        <p:nvSpPr>
+          <p:cNvPr id="7" name="Rounded Rectangle 6"/>
+          <p:cNvSpPr/>
+          <p:nvPr/>
+        </p:nvSpPr>
+        <p:spPr>
+          <a:xfrm>
+            <a:off x="868680" y="1627632"/>
+            <a:ext cx="2011680" cy="73152"/>
+          </a:xfrm>
+          <a:prstGeom prst="roundRect">
+            <a:avLst/>
+          </a:prstGeom>
+          <a:solidFill>
+            <a:srgbClr val="E8801A"/>
+          </a:solidFill>
+          <a:ln>
+            <a:noFill/>
+          </a:ln>
+          <a:effectLst/>
+        </p:spPr>
+        <p:style>
+          <a:lnRef idx="1">
+            <a:schemeClr val="accent1"/>
+          </a:lnRef>
+          <a:fillRef idx="3">
+            <a:schemeClr val="accent1"/>
+          </a:fillRef>
+          <a:effectRef idx="2">
+            <a:schemeClr val="accent1"/>
+          </a:effectRef>
+          <a:fontRef idx="minor">
+            <a:schemeClr val="lt1"/>
+          </a:fontRef>
+        </p:style>
+        <p:txBody>
+          <a:bodyPr rtlCol="0" anchor="ctr"/>
+          <a:lstStyle/>
+          <a:p>
+            <a:pPr algn="ctr"/>
+          </a:p>
+        </p:txBody>
+      </p:sp>
+      <p:sp>
+        <p:nvSpPr>
+          <p:cNvPr id="8" name="TextBox 7"/>
           <p:cNvSpPr txBox="1"/>
           <p:nvPr/>
         </p:nvSpPr>
         <p:spPr>
           <a:xfrm>
-            <a:off x="822960" y="1920240"/>
+            <a:off x="822960" y="1965960"/>
             <a:ext cx="4983480" cy="4206240"/>
           </a:xfrm>
           <a:prstGeom prst="rect">
@@ -9197,17 +10283,17 @@
           <a:p>
             <a:pPr>
               <a:spcAft>
-                <a:spcPts val="1000"/>
+                <a:spcPts val="1100"/>
               </a:spcAft>
             </a:pPr>
             <a:r>
               <a:rPr sz="1600" b="1" i="0">
                 <a:solidFill>
-                  <a:srgbClr val="2E3A80"/>
-                </a:solidFill>
-                <a:latin typeface="Montserrat"/>
-              </a:rPr>
-              <a:t>•  </a:t>
+                  <a:srgbClr val="E8801A"/>
+                </a:solidFill>
+                <a:latin typeface="Montserrat"/>
+              </a:rPr>
+              <a:t>▸  </a:t>
             </a:r>
             <a:r>
               <a:rPr sz="1600" b="0" i="0">
@@ -9216,23 +10302,23 @@
                 </a:solidFill>
                 <a:latin typeface="Montserrat"/>
               </a:rPr>
-              <a:t>Hasta 0,05 bar: soldadura blanda</a:t>
+              <a:t>Huecos de ascensor y montacargas</a:t>
             </a:r>
           </a:p>
           <a:p>
             <a:pPr>
               <a:spcAft>
-                <a:spcPts val="1000"/>
+                <a:spcPts val="1100"/>
               </a:spcAft>
             </a:pPr>
             <a:r>
               <a:rPr sz="1600" b="1" i="0">
                 <a:solidFill>
-                  <a:srgbClr val="2E3A80"/>
-                </a:solidFill>
-                <a:latin typeface="Montserrat"/>
-              </a:rPr>
-              <a:t>•  </a:t>
+                  <a:srgbClr val="E8801A"/>
+                </a:solidFill>
+                <a:latin typeface="Montserrat"/>
+              </a:rPr>
+              <a:t>▸  </a:t>
             </a:r>
             <a:r>
               <a:rPr sz="1600" b="0" i="0">
@@ -9241,23 +10327,23 @@
                 </a:solidFill>
                 <a:latin typeface="Montserrat"/>
               </a:rPr>
-              <a:t>Por encima de 0,05 bar: fuerte</a:t>
+              <a:t>Bajantes de basura y chimeneas</a:t>
             </a:r>
           </a:p>
           <a:p>
             <a:pPr>
               <a:spcAft>
-                <a:spcPts val="1000"/>
+                <a:spcPts val="1100"/>
               </a:spcAft>
             </a:pPr>
             <a:r>
               <a:rPr sz="1600" b="1" i="0">
                 <a:solidFill>
-                  <a:srgbClr val="2E3A80"/>
-                </a:solidFill>
-                <a:latin typeface="Montserrat"/>
-              </a:rPr>
-              <a:t>•  </a:t>
+                  <a:srgbClr val="E8801A"/>
+                </a:solidFill>
+                <a:latin typeface="Montserrat"/>
+              </a:rPr>
+              <a:t>▸  </a:t>
             </a:r>
             <a:r>
               <a:rPr sz="1600" b="0" i="0">
@@ -9266,23 +10352,23 @@
                 </a:solidFill>
                 <a:latin typeface="Montserrat"/>
               </a:rPr>
-              <a:t>Siempre fuerte en aparcamientos cerrados</a:t>
+              <a:t>Transformadores y combustibles líquidos</a:t>
             </a:r>
           </a:p>
           <a:p>
             <a:pPr>
               <a:spcAft>
-                <a:spcPts val="1000"/>
+                <a:spcPts val="1100"/>
               </a:spcAft>
             </a:pPr>
             <a:r>
               <a:rPr sz="1600" b="1" i="0">
                 <a:solidFill>
-                  <a:srgbClr val="2E3A80"/>
-                </a:solidFill>
-                <a:latin typeface="Montserrat"/>
-              </a:rPr>
-              <a:t>•  </a:t>
+                  <a:srgbClr val="E8801A"/>
+                </a:solidFill>
+                <a:latin typeface="Montserrat"/>
+              </a:rPr>
+              <a:t>▸  </a:t>
             </a:r>
             <a:r>
               <a:rPr sz="1600" b="0" i="0">
@@ -9291,14 +10377,14 @@
                 </a:solidFill>
                 <a:latin typeface="Montserrat"/>
               </a:rPr>
-              <a:t>Fuerte si cocina tipo A &gt; 30 kW</a:t>
-            </a:r>
-          </a:p>
-        </p:txBody>
-      </p:sp>
-      <p:sp>
-        <p:nvSpPr>
-          <p:cNvPr id="8" name="imgph" descr="IMGQ:brazing copper pipe with torch flame"/>
+              <a:t>Bocas de ventilación (salvo envainado)</a:t>
+            </a:r>
+          </a:p>
+        </p:txBody>
+      </p:sp>
+      <p:sp>
+        <p:nvSpPr>
+          <p:cNvPr id="9" name="imgph" descr="IMGQ:elevator shaft inside building"/>
           <p:cNvSpPr/>
           <p:nvPr/>
         </p:nvSpPr>
@@ -9344,7 +10430,7 @@
       </p:sp>
       <p:sp>
         <p:nvSpPr>
-          <p:cNvPr id="9" name="TextBox 8"/>
+          <p:cNvPr id="10" name="TextBox 9"/>
           <p:cNvSpPr txBox="1"/>
           <p:nvPr/>
         </p:nvSpPr>
@@ -9384,7 +10470,7 @@
                 </a:solidFill>
                 <a:latin typeface="Montserrat"/>
               </a:rPr>
-              <a:t>brazing copper pipe with torch flame</a:t>
+              <a:t>elevator shaft inside building</a:t>
             </a:r>
           </a:p>
         </p:txBody>
@@ -9481,7 +10567,7 @@
                 </a:solidFill>
                 <a:latin typeface="Montserrat"/>
               </a:rPr>
-              <a:t>006 / 016</a:t>
+              <a:t>006 / 017</a:t>
             </a:r>
           </a:p>
         </p:txBody>
@@ -9529,7 +10615,7 @@
         <p:spPr>
           <a:xfrm>
             <a:off x="822960" y="457200"/>
-            <a:ext cx="8229600" cy="365760"/>
+            <a:ext cx="10058400" cy="365760"/>
           </a:xfrm>
           <a:prstGeom prst="rect">
             <a:avLst/>
@@ -9543,13 +10629,13 @@
           <a:lstStyle/>
           <a:p>
             <a:r>
-              <a:rPr sz="1200" b="1" i="0">
-                <a:solidFill>
-                  <a:srgbClr val="64748B"/>
-                </a:solidFill>
-                <a:latin typeface="Montserrat"/>
-              </a:rPr>
-              <a:t>MATERIALES Y NORMAS</a:t>
+              <a:rPr sz="1300" b="1" i="0">
+                <a:solidFill>
+                  <a:srgbClr val="E8801A"/>
+                </a:solidFill>
+                <a:latin typeface="Montserrat"/>
+              </a:rPr>
+              <a:t>MATERIALES Y ACCESORIOS</a:t>
             </a:r>
           </a:p>
         </p:txBody>
@@ -9577,26 +10663,70 @@
           <a:lstStyle/>
           <a:p>
             <a:r>
-              <a:rPr sz="2700" b="1" i="0">
+              <a:rPr sz="2800" b="1" i="0">
                 <a:solidFill>
                   <a:srgbClr val="1E2761"/>
                 </a:solidFill>
                 <a:latin typeface="Montserrat"/>
               </a:rPr>
-              <a:t>Cada material, con su norma UNE</a:t>
-            </a:r>
-          </a:p>
-        </p:txBody>
-      </p:sp>
-      <p:sp>
-        <p:nvSpPr>
-          <p:cNvPr id="7" name="TextBox 6"/>
+              <a:t>Soldadura: la frontera es la presión</a:t>
+            </a:r>
+          </a:p>
+        </p:txBody>
+      </p:sp>
+      <p:sp>
+        <p:nvSpPr>
+          <p:cNvPr id="7" name="Rounded Rectangle 6"/>
+          <p:cNvSpPr/>
+          <p:nvPr/>
+        </p:nvSpPr>
+        <p:spPr>
+          <a:xfrm>
+            <a:off x="868680" y="1627632"/>
+            <a:ext cx="2011680" cy="73152"/>
+          </a:xfrm>
+          <a:prstGeom prst="roundRect">
+            <a:avLst/>
+          </a:prstGeom>
+          <a:solidFill>
+            <a:srgbClr val="E8801A"/>
+          </a:solidFill>
+          <a:ln>
+            <a:noFill/>
+          </a:ln>
+          <a:effectLst/>
+        </p:spPr>
+        <p:style>
+          <a:lnRef idx="1">
+            <a:schemeClr val="accent1"/>
+          </a:lnRef>
+          <a:fillRef idx="3">
+            <a:schemeClr val="accent1"/>
+          </a:fillRef>
+          <a:effectRef idx="2">
+            <a:schemeClr val="accent1"/>
+          </a:effectRef>
+          <a:fontRef idx="minor">
+            <a:schemeClr val="lt1"/>
+          </a:fontRef>
+        </p:style>
+        <p:txBody>
+          <a:bodyPr rtlCol="0" anchor="ctr"/>
+          <a:lstStyle/>
+          <a:p>
+            <a:pPr algn="ctr"/>
+          </a:p>
+        </p:txBody>
+      </p:sp>
+      <p:sp>
+        <p:nvSpPr>
+          <p:cNvPr id="8" name="TextBox 7"/>
           <p:cNvSpPr txBox="1"/>
           <p:nvPr/>
         </p:nvSpPr>
         <p:spPr>
           <a:xfrm>
-            <a:off x="822960" y="1920240"/>
+            <a:off x="822960" y="1965960"/>
             <a:ext cx="4983480" cy="4206240"/>
           </a:xfrm>
           <a:prstGeom prst="rect">
@@ -9612,17 +10742,17 @@
           <a:p>
             <a:pPr>
               <a:spcAft>
-                <a:spcPts val="1000"/>
+                <a:spcPts val="1100"/>
               </a:spcAft>
             </a:pPr>
             <a:r>
               <a:rPr sz="1600" b="1" i="0">
                 <a:solidFill>
-                  <a:srgbClr val="2E3A80"/>
-                </a:solidFill>
-                <a:latin typeface="Montserrat"/>
-              </a:rPr>
-              <a:t>•  </a:t>
+                  <a:srgbClr val="E8801A"/>
+                </a:solidFill>
+                <a:latin typeface="Montserrat"/>
+              </a:rPr>
+              <a:t>▸  </a:t>
             </a:r>
             <a:r>
               <a:rPr sz="1600" b="0" i="0">
@@ -9631,23 +10761,23 @@
                 </a:solidFill>
                 <a:latin typeface="Montserrat"/>
               </a:rPr>
-              <a:t>Cobre: UNE-EN 1057</a:t>
+              <a:t>Hasta 0,05 bar: soldadura blanda</a:t>
             </a:r>
           </a:p>
           <a:p>
             <a:pPr>
               <a:spcAft>
-                <a:spcPts val="1000"/>
+                <a:spcPts val="1100"/>
               </a:spcAft>
             </a:pPr>
             <a:r>
               <a:rPr sz="1600" b="1" i="0">
                 <a:solidFill>
-                  <a:srgbClr val="2E3A80"/>
-                </a:solidFill>
-                <a:latin typeface="Montserrat"/>
-              </a:rPr>
-              <a:t>•  </a:t>
+                  <a:srgbClr val="E8801A"/>
+                </a:solidFill>
+                <a:latin typeface="Montserrat"/>
+              </a:rPr>
+              <a:t>▸  </a:t>
             </a:r>
             <a:r>
               <a:rPr sz="1600" b="0" i="0">
@@ -9656,23 +10786,23 @@
                 </a:solidFill>
                 <a:latin typeface="Montserrat"/>
               </a:rPr>
-              <a:t>Multicapa: UNE 53008</a:t>
+              <a:t>Por encima de 0,05 bar: fuerte</a:t>
             </a:r>
           </a:p>
           <a:p>
             <a:pPr>
               <a:spcAft>
-                <a:spcPts val="1000"/>
+                <a:spcPts val="1100"/>
               </a:spcAft>
             </a:pPr>
             <a:r>
               <a:rPr sz="1600" b="1" i="0">
                 <a:solidFill>
-                  <a:srgbClr val="2E3A80"/>
-                </a:solidFill>
-                <a:latin typeface="Montserrat"/>
-              </a:rPr>
-              <a:t>•  </a:t>
+                  <a:srgbClr val="E8801A"/>
+                </a:solidFill>
+                <a:latin typeface="Montserrat"/>
+              </a:rPr>
+              <a:t>▸  </a:t>
             </a:r>
             <a:r>
               <a:rPr sz="1600" b="0" i="0">
@@ -9681,23 +10811,23 @@
                 </a:solidFill>
                 <a:latin typeface="Montserrat"/>
               </a:rPr>
-              <a:t>Corrugado inox ≤ 0,5 bar: UNE-EN 15266</a:t>
+              <a:t>Siempre fuerte en aparcamientos cerrados</a:t>
             </a:r>
           </a:p>
           <a:p>
             <a:pPr>
               <a:spcAft>
-                <a:spcPts val="1000"/>
+                <a:spcPts val="1100"/>
               </a:spcAft>
             </a:pPr>
             <a:r>
               <a:rPr sz="1600" b="1" i="0">
                 <a:solidFill>
-                  <a:srgbClr val="2E3A80"/>
-                </a:solidFill>
-                <a:latin typeface="Montserrat"/>
-              </a:rPr>
-              <a:t>•  </a:t>
+                  <a:srgbClr val="E8801A"/>
+                </a:solidFill>
+                <a:latin typeface="Montserrat"/>
+              </a:rPr>
+              <a:t>▸  </a:t>
             </a:r>
             <a:r>
               <a:rPr sz="1600" b="0" i="0">
@@ -9706,14 +10836,14 @@
                 </a:solidFill>
                 <a:latin typeface="Montserrat"/>
               </a:rPr>
-              <a:t>Llaves Dn&lt;50: UNE-EN 331</a:t>
-            </a:r>
-          </a:p>
-        </p:txBody>
-      </p:sp>
-      <p:sp>
-        <p:nvSpPr>
-          <p:cNvPr id="8" name="imgph" descr="IMGQ:different metal pipes copper and steel"/>
+              <a:t>Fuerte si cocina tipo A &gt; 30 kW</a:t>
+            </a:r>
+          </a:p>
+        </p:txBody>
+      </p:sp>
+      <p:sp>
+        <p:nvSpPr>
+          <p:cNvPr id="9" name="imgph" descr="IMGQ:brazing copper pipe with torch flame"/>
           <p:cNvSpPr/>
           <p:nvPr/>
         </p:nvSpPr>
@@ -9759,7 +10889,7 @@
       </p:sp>
       <p:sp>
         <p:nvSpPr>
-          <p:cNvPr id="9" name="TextBox 8"/>
+          <p:cNvPr id="10" name="TextBox 9"/>
           <p:cNvSpPr txBox="1"/>
           <p:nvPr/>
         </p:nvSpPr>
@@ -9799,7 +10929,7 @@
                 </a:solidFill>
                 <a:latin typeface="Montserrat"/>
               </a:rPr>
-              <a:t>different metal pipes copper and steel</a:t>
+              <a:t>brazing copper pipe with torch flame</a:t>
             </a:r>
           </a:p>
         </p:txBody>
@@ -9896,7 +11026,7 @@
                 </a:solidFill>
                 <a:latin typeface="Montserrat"/>
               </a:rPr>
-              <a:t>007 / 016</a:t>
+              <a:t>007 / 017</a:t>
             </a:r>
           </a:p>
         </p:txBody>
@@ -9944,7 +11074,7 @@
         <p:spPr>
           <a:xfrm>
             <a:off x="822960" y="457200"/>
-            <a:ext cx="8229600" cy="365760"/>
+            <a:ext cx="10058400" cy="365760"/>
           </a:xfrm>
           <a:prstGeom prst="rect">
             <a:avLst/>
@@ -9958,13 +11088,13 @@
           <a:lstStyle/>
           <a:p>
             <a:r>
-              <a:rPr sz="1200" b="1" i="0">
-                <a:solidFill>
-                  <a:srgbClr val="64748B"/>
-                </a:solidFill>
-                <a:latin typeface="Montserrat"/>
-              </a:rPr>
-              <a:t>TIPOS DE TUBERÍA</a:t>
+              <a:rPr sz="1300" b="1" i="0">
+                <a:solidFill>
+                  <a:srgbClr val="E8801A"/>
+                </a:solidFill>
+                <a:latin typeface="Montserrat"/>
+              </a:rPr>
+              <a:t>MATERIALES Y NORMAS</a:t>
             </a:r>
           </a:p>
         </p:txBody>
@@ -9992,26 +11122,70 @@
           <a:lstStyle/>
           <a:p>
             <a:r>
-              <a:rPr sz="2700" b="1" i="0">
+              <a:rPr sz="2800" b="1" i="0">
                 <a:solidFill>
                   <a:srgbClr val="1E2761"/>
                 </a:solidFill>
                 <a:latin typeface="Montserrat"/>
               </a:rPr>
-              <a:t>Cobre recocido, cobre duro y cómo curvar</a:t>
-            </a:r>
-          </a:p>
-        </p:txBody>
-      </p:sp>
-      <p:sp>
-        <p:nvSpPr>
-          <p:cNvPr id="7" name="TextBox 6"/>
+              <a:t>Cada material, con su norma UNE</a:t>
+            </a:r>
+          </a:p>
+        </p:txBody>
+      </p:sp>
+      <p:sp>
+        <p:nvSpPr>
+          <p:cNvPr id="7" name="Rounded Rectangle 6"/>
+          <p:cNvSpPr/>
+          <p:nvPr/>
+        </p:nvSpPr>
+        <p:spPr>
+          <a:xfrm>
+            <a:off x="868680" y="1627632"/>
+            <a:ext cx="2011680" cy="73152"/>
+          </a:xfrm>
+          <a:prstGeom prst="roundRect">
+            <a:avLst/>
+          </a:prstGeom>
+          <a:solidFill>
+            <a:srgbClr val="E8801A"/>
+          </a:solidFill>
+          <a:ln>
+            <a:noFill/>
+          </a:ln>
+          <a:effectLst/>
+        </p:spPr>
+        <p:style>
+          <a:lnRef idx="1">
+            <a:schemeClr val="accent1"/>
+          </a:lnRef>
+          <a:fillRef idx="3">
+            <a:schemeClr val="accent1"/>
+          </a:fillRef>
+          <a:effectRef idx="2">
+            <a:schemeClr val="accent1"/>
+          </a:effectRef>
+          <a:fontRef idx="minor">
+            <a:schemeClr val="lt1"/>
+          </a:fontRef>
+        </p:style>
+        <p:txBody>
+          <a:bodyPr rtlCol="0" anchor="ctr"/>
+          <a:lstStyle/>
+          <a:p>
+            <a:pPr algn="ctr"/>
+          </a:p>
+        </p:txBody>
+      </p:sp>
+      <p:sp>
+        <p:nvSpPr>
+          <p:cNvPr id="8" name="TextBox 7"/>
           <p:cNvSpPr txBox="1"/>
           <p:nvPr/>
         </p:nvSpPr>
         <p:spPr>
           <a:xfrm>
-            <a:off x="822960" y="1920240"/>
+            <a:off x="822960" y="1965960"/>
             <a:ext cx="4983480" cy="4206240"/>
           </a:xfrm>
           <a:prstGeom prst="rect">
@@ -10027,17 +11201,17 @@
           <a:p>
             <a:pPr>
               <a:spcAft>
-                <a:spcPts val="1000"/>
+                <a:spcPts val="1100"/>
               </a:spcAft>
             </a:pPr>
             <a:r>
               <a:rPr sz="1600" b="1" i="0">
                 <a:solidFill>
-                  <a:srgbClr val="2E3A80"/>
-                </a:solidFill>
-                <a:latin typeface="Montserrat"/>
-              </a:rPr>
-              <a:t>•  </a:t>
+                  <a:srgbClr val="E8801A"/>
+                </a:solidFill>
+                <a:latin typeface="Montserrat"/>
+              </a:rPr>
+              <a:t>▸  </a:t>
             </a:r>
             <a:r>
               <a:rPr sz="1600" b="0" i="0">
@@ -10046,23 +11220,23 @@
                 </a:solidFill>
                 <a:latin typeface="Montserrat"/>
               </a:rPr>
-              <a:t>Recocido: blando, en rollo, se dobla</a:t>
+              <a:t>Cobre: UNE-EN 1057</a:t>
             </a:r>
           </a:p>
           <a:p>
             <a:pPr>
               <a:spcAft>
-                <a:spcPts val="1000"/>
+                <a:spcPts val="1100"/>
               </a:spcAft>
             </a:pPr>
             <a:r>
               <a:rPr sz="1600" b="1" i="0">
                 <a:solidFill>
-                  <a:srgbClr val="2E3A80"/>
-                </a:solidFill>
-                <a:latin typeface="Montserrat"/>
-              </a:rPr>
-              <a:t>•  </a:t>
+                  <a:srgbClr val="E8801A"/>
+                </a:solidFill>
+                <a:latin typeface="Montserrat"/>
+              </a:rPr>
+              <a:t>▸  </a:t>
             </a:r>
             <a:r>
               <a:rPr sz="1600" b="0" i="0">
@@ -10071,23 +11245,23 @@
                 </a:solidFill>
                 <a:latin typeface="Montserrat"/>
               </a:rPr>
-              <a:t>Duro: barra rígida, soldadura o press-fitting</a:t>
+              <a:t>Multicapa: UNE 53008</a:t>
             </a:r>
           </a:p>
           <a:p>
             <a:pPr>
               <a:spcAft>
-                <a:spcPts val="1000"/>
+                <a:spcPts val="1100"/>
               </a:spcAft>
             </a:pPr>
             <a:r>
               <a:rPr sz="1600" b="1" i="0">
                 <a:solidFill>
-                  <a:srgbClr val="2E3A80"/>
-                </a:solidFill>
-                <a:latin typeface="Montserrat"/>
-              </a:rPr>
-              <a:t>•  </a:t>
+                  <a:srgbClr val="E8801A"/>
+                </a:solidFill>
+                <a:latin typeface="Montserrat"/>
+              </a:rPr>
+              <a:t>▸  </a:t>
             </a:r>
             <a:r>
               <a:rPr sz="1600" b="0" i="0">
@@ -10096,23 +11270,23 @@
                 </a:solidFill>
                 <a:latin typeface="Montserrat"/>
               </a:rPr>
-              <a:t>Curvar en frío, sin aplastar</a:t>
+              <a:t>Corrugado inox ≤ 0,5 bar: UNE-EN 15266</a:t>
             </a:r>
           </a:p>
           <a:p>
             <a:pPr>
               <a:spcAft>
-                <a:spcPts val="1000"/>
+                <a:spcPts val="1100"/>
               </a:spcAft>
             </a:pPr>
             <a:r>
               <a:rPr sz="1600" b="1" i="0">
                 <a:solidFill>
-                  <a:srgbClr val="2E3A80"/>
-                </a:solidFill>
-                <a:latin typeface="Montserrat"/>
-              </a:rPr>
-              <a:t>•  </a:t>
+                  <a:srgbClr val="E8801A"/>
+                </a:solidFill>
+                <a:latin typeface="Montserrat"/>
+              </a:rPr>
+              <a:t>▸  </a:t>
             </a:r>
             <a:r>
               <a:rPr sz="1600" b="0" i="0">
@@ -10121,14 +11295,14 @@
                 </a:solidFill>
                 <a:latin typeface="Montserrat"/>
               </a:rPr>
-              <a:t>Enterrado: espesor ≥ 1,5 mm</a:t>
-            </a:r>
-          </a:p>
-        </p:txBody>
-      </p:sp>
-      <p:sp>
-        <p:nvSpPr>
-          <p:cNvPr id="8" name="imgph" descr="IMGQ:coil roll of copper pipe"/>
+              <a:t>Llaves Dn&lt;50: UNE-EN 331</a:t>
+            </a:r>
+          </a:p>
+        </p:txBody>
+      </p:sp>
+      <p:sp>
+        <p:nvSpPr>
+          <p:cNvPr id="9" name="imgph" descr="IMGQ:different metal pipes copper and steel"/>
           <p:cNvSpPr/>
           <p:nvPr/>
         </p:nvSpPr>
@@ -10174,7 +11348,7 @@
       </p:sp>
       <p:sp>
         <p:nvSpPr>
-          <p:cNvPr id="9" name="TextBox 8"/>
+          <p:cNvPr id="10" name="TextBox 9"/>
           <p:cNvSpPr txBox="1"/>
           <p:nvPr/>
         </p:nvSpPr>
@@ -10214,7 +11388,7 @@
                 </a:solidFill>
                 <a:latin typeface="Montserrat"/>
               </a:rPr>
-              <a:t>coil roll of copper pipe</a:t>
+              <a:t>different metal pipes copper and steel</a:t>
             </a:r>
           </a:p>
         </p:txBody>
@@ -10311,7 +11485,7 @@
                 </a:solidFill>
                 <a:latin typeface="Montserrat"/>
               </a:rPr>
-              <a:t>008 / 016</a:t>
+              <a:t>008 / 017</a:t>
             </a:r>
           </a:p>
         </p:txBody>
@@ -10359,7 +11533,7 @@
         <p:spPr>
           <a:xfrm>
             <a:off x="822960" y="457200"/>
-            <a:ext cx="8229600" cy="365760"/>
+            <a:ext cx="10058400" cy="365760"/>
           </a:xfrm>
           <a:prstGeom prst="rect">
             <a:avLst/>
@@ -10373,13 +11547,13 @@
           <a:lstStyle/>
           <a:p>
             <a:r>
-              <a:rPr sz="1200" b="1" i="0">
-                <a:solidFill>
-                  <a:srgbClr val="64748B"/>
-                </a:solidFill>
-                <a:latin typeface="Montserrat"/>
-              </a:rPr>
-              <a:t>UNIONES MECÁNICAS</a:t>
+              <a:rPr sz="1300" b="1" i="0">
+                <a:solidFill>
+                  <a:srgbClr val="E8801A"/>
+                </a:solidFill>
+                <a:latin typeface="Montserrat"/>
+              </a:rPr>
+              <a:t>TIPOS DE TUBERÍA</a:t>
             </a:r>
           </a:p>
         </p:txBody>
@@ -10407,26 +11581,70 @@
           <a:lstStyle/>
           <a:p>
             <a:r>
-              <a:rPr sz="2700" b="1" i="0">
+              <a:rPr sz="2800" b="1" i="0">
                 <a:solidFill>
                   <a:srgbClr val="1E2761"/>
                 </a:solidFill>
                 <a:latin typeface="Montserrat"/>
               </a:rPr>
-              <a:t>Cada metal con su pareja</a:t>
-            </a:r>
-          </a:p>
-        </p:txBody>
-      </p:sp>
-      <p:sp>
-        <p:nvSpPr>
-          <p:cNvPr id="7" name="TextBox 6"/>
+              <a:t>Cobre recocido, cobre duro y cómo curvar</a:t>
+            </a:r>
+          </a:p>
+        </p:txBody>
+      </p:sp>
+      <p:sp>
+        <p:nvSpPr>
+          <p:cNvPr id="7" name="Rounded Rectangle 6"/>
+          <p:cNvSpPr/>
+          <p:nvPr/>
+        </p:nvSpPr>
+        <p:spPr>
+          <a:xfrm>
+            <a:off x="868680" y="1627632"/>
+            <a:ext cx="2011680" cy="73152"/>
+          </a:xfrm>
+          <a:prstGeom prst="roundRect">
+            <a:avLst/>
+          </a:prstGeom>
+          <a:solidFill>
+            <a:srgbClr val="E8801A"/>
+          </a:solidFill>
+          <a:ln>
+            <a:noFill/>
+          </a:ln>
+          <a:effectLst/>
+        </p:spPr>
+        <p:style>
+          <a:lnRef idx="1">
+            <a:schemeClr val="accent1"/>
+          </a:lnRef>
+          <a:fillRef idx="3">
+            <a:schemeClr val="accent1"/>
+          </a:fillRef>
+          <a:effectRef idx="2">
+            <a:schemeClr val="accent1"/>
+          </a:effectRef>
+          <a:fontRef idx="minor">
+            <a:schemeClr val="lt1"/>
+          </a:fontRef>
+        </p:style>
+        <p:txBody>
+          <a:bodyPr rtlCol="0" anchor="ctr"/>
+          <a:lstStyle/>
+          <a:p>
+            <a:pPr algn="ctr"/>
+          </a:p>
+        </p:txBody>
+      </p:sp>
+      <p:sp>
+        <p:nvSpPr>
+          <p:cNvPr id="8" name="TextBox 7"/>
           <p:cNvSpPr txBox="1"/>
           <p:nvPr/>
         </p:nvSpPr>
         <p:spPr>
           <a:xfrm>
-            <a:off x="822960" y="1920240"/>
+            <a:off x="822960" y="1965960"/>
             <a:ext cx="4983480" cy="4206240"/>
           </a:xfrm>
           <a:prstGeom prst="rect">
@@ -10442,17 +11660,17 @@
           <a:p>
             <a:pPr>
               <a:spcAft>
-                <a:spcPts val="1000"/>
+                <a:spcPts val="1100"/>
               </a:spcAft>
             </a:pPr>
             <a:r>
               <a:rPr sz="1600" b="1" i="0">
                 <a:solidFill>
-                  <a:srgbClr val="2E3A80"/>
-                </a:solidFill>
-                <a:latin typeface="Montserrat"/>
-              </a:rPr>
-              <a:t>•  </a:t>
+                  <a:srgbClr val="E8801A"/>
+                </a:solidFill>
+                <a:latin typeface="Montserrat"/>
+              </a:rPr>
+              <a:t>▸  </a:t>
             </a:r>
             <a:r>
               <a:rPr sz="1600" b="0" i="0">
@@ -10461,23 +11679,23 @@
                 </a:solidFill>
                 <a:latin typeface="Montserrat"/>
               </a:rPr>
-              <a:t>Press-fitting: interior y exterior hasta 5 bar</a:t>
+              <a:t>Recocido: blando, en rollo, se dobla</a:t>
             </a:r>
           </a:p>
           <a:p>
             <a:pPr>
               <a:spcAft>
-                <a:spcPts val="1000"/>
+                <a:spcPts val="1100"/>
               </a:spcAft>
             </a:pPr>
             <a:r>
               <a:rPr sz="1600" b="1" i="0">
                 <a:solidFill>
-                  <a:srgbClr val="2E3A80"/>
-                </a:solidFill>
-                <a:latin typeface="Montserrat"/>
-              </a:rPr>
-              <a:t>•  </a:t>
+                  <a:srgbClr val="E8801A"/>
+                </a:solidFill>
+                <a:latin typeface="Montserrat"/>
+              </a:rPr>
+              <a:t>▸  </a:t>
             </a:r>
             <a:r>
               <a:rPr sz="1600" b="0" i="0">
@@ -10486,23 +11704,23 @@
                 </a:solidFill>
                 <a:latin typeface="Montserrat"/>
               </a:rPr>
-              <a:t>Sustituye a la soldadura fuerte</a:t>
+              <a:t>Duro: barra rígida, soldadura o press-fitting</a:t>
             </a:r>
           </a:p>
           <a:p>
             <a:pPr>
               <a:spcAft>
-                <a:spcPts val="1000"/>
+                <a:spcPts val="1100"/>
               </a:spcAft>
             </a:pPr>
             <a:r>
               <a:rPr sz="1600" b="1" i="0">
                 <a:solidFill>
-                  <a:srgbClr val="2E3A80"/>
-                </a:solidFill>
-                <a:latin typeface="Montserrat"/>
-              </a:rPr>
-              <a:t>•  </a:t>
+                  <a:srgbClr val="E8801A"/>
+                </a:solidFill>
+                <a:latin typeface="Montserrat"/>
+              </a:rPr>
+              <a:t>▸  </a:t>
             </a:r>
             <a:r>
               <a:rPr sz="1600" b="0" i="0">
@@ -10511,23 +11729,23 @@
                 </a:solidFill>
                 <a:latin typeface="Montserrat"/>
               </a:rPr>
-              <a:t>Inox con cobre: manguito CuNi</a:t>
+              <a:t>Curvar en frío, sin aplastar</a:t>
             </a:r>
           </a:p>
           <a:p>
             <a:pPr>
               <a:spcAft>
-                <a:spcPts val="1000"/>
+                <a:spcPts val="1100"/>
               </a:spcAft>
             </a:pPr>
             <a:r>
               <a:rPr sz="1600" b="1" i="0">
                 <a:solidFill>
-                  <a:srgbClr val="2E3A80"/>
-                </a:solidFill>
-                <a:latin typeface="Montserrat"/>
-              </a:rPr>
-              <a:t>•  </a:t>
+                  <a:srgbClr val="E8801A"/>
+                </a:solidFill>
+                <a:latin typeface="Montserrat"/>
+              </a:rPr>
+              <a:t>▸  </a:t>
             </a:r>
             <a:r>
               <a:rPr sz="1600" b="0" i="0">
@@ -10536,14 +11754,14 @@
                 </a:solidFill>
                 <a:latin typeface="Montserrat"/>
               </a:rPr>
-              <a:t>Inox de serie 2, mismo diámetro</a:t>
-            </a:r>
-          </a:p>
-        </p:txBody>
-      </p:sp>
-      <p:sp>
-        <p:nvSpPr>
-          <p:cNvPr id="8" name="imgph" descr="IMGQ:press fitting pipe connection tool"/>
+              <a:t>Enterrado: espesor ≥ 1,5 mm</a:t>
+            </a:r>
+          </a:p>
+        </p:txBody>
+      </p:sp>
+      <p:sp>
+        <p:nvSpPr>
+          <p:cNvPr id="9" name="imgph" descr="IMGQ:coil roll of copper pipe"/>
           <p:cNvSpPr/>
           <p:nvPr/>
         </p:nvSpPr>
@@ -10589,7 +11807,7 @@
       </p:sp>
       <p:sp>
         <p:nvSpPr>
-          <p:cNvPr id="9" name="TextBox 8"/>
+          <p:cNvPr id="10" name="TextBox 9"/>
           <p:cNvSpPr txBox="1"/>
           <p:nvPr/>
         </p:nvSpPr>
@@ -10629,7 +11847,7 @@
                 </a:solidFill>
                 <a:latin typeface="Montserrat"/>
               </a:rPr>
-              <a:t>press fitting pipe connection tool</a:t>
+              <a:t>coil roll of copper pipe</a:t>
             </a:r>
           </a:p>
         </p:txBody>
@@ -10726,7 +11944,7 @@
                 </a:solidFill>
                 <a:latin typeface="Montserrat"/>
               </a:rPr>
-              <a:t>009 / 016</a:t>
+              <a:t>009 / 017</a:t>
             </a:r>
           </a:p>
         </p:txBody>
@@ -10774,7 +11992,7 @@
         <p:spPr>
           <a:xfrm>
             <a:off x="822960" y="457200"/>
-            <a:ext cx="8229600" cy="365760"/>
+            <a:ext cx="10058400" cy="365760"/>
           </a:xfrm>
           <a:prstGeom prst="rect">
             <a:avLst/>
@@ -10788,13 +12006,13 @@
           <a:lstStyle/>
           <a:p>
             <a:r>
-              <a:rPr sz="1200" b="1" i="0">
-                <a:solidFill>
-                  <a:srgbClr val="64748B"/>
-                </a:solidFill>
-                <a:latin typeface="Montserrat"/>
-              </a:rPr>
-              <a:t>TUBO MULTICAPA</a:t>
+              <a:rPr sz="1300" b="1" i="0">
+                <a:solidFill>
+                  <a:srgbClr val="E8801A"/>
+                </a:solidFill>
+                <a:latin typeface="Montserrat"/>
+              </a:rPr>
+              <a:t>UNIONES MECÁNICAS</a:t>
             </a:r>
           </a:p>
         </p:txBody>
@@ -10822,26 +12040,70 @@
           <a:lstStyle/>
           <a:p>
             <a:r>
-              <a:rPr sz="2700" b="1" i="0">
+              <a:rPr sz="2800" b="1" i="0">
                 <a:solidFill>
                   <a:srgbClr val="1E2761"/>
                 </a:solidFill>
                 <a:latin typeface="Montserrat"/>
               </a:rPr>
-              <a:t>Multicapa: colores que identifican el gas</a:t>
-            </a:r>
-          </a:p>
-        </p:txBody>
-      </p:sp>
-      <p:sp>
-        <p:nvSpPr>
-          <p:cNvPr id="7" name="TextBox 6"/>
+              <a:t>Cada metal con su pareja</a:t>
+            </a:r>
+          </a:p>
+        </p:txBody>
+      </p:sp>
+      <p:sp>
+        <p:nvSpPr>
+          <p:cNvPr id="7" name="Rounded Rectangle 6"/>
+          <p:cNvSpPr/>
+          <p:nvPr/>
+        </p:nvSpPr>
+        <p:spPr>
+          <a:xfrm>
+            <a:off x="868680" y="1627632"/>
+            <a:ext cx="2011680" cy="73152"/>
+          </a:xfrm>
+          <a:prstGeom prst="roundRect">
+            <a:avLst/>
+          </a:prstGeom>
+          <a:solidFill>
+            <a:srgbClr val="E8801A"/>
+          </a:solidFill>
+          <a:ln>
+            <a:noFill/>
+          </a:ln>
+          <a:effectLst/>
+        </p:spPr>
+        <p:style>
+          <a:lnRef idx="1">
+            <a:schemeClr val="accent1"/>
+          </a:lnRef>
+          <a:fillRef idx="3">
+            <a:schemeClr val="accent1"/>
+          </a:fillRef>
+          <a:effectRef idx="2">
+            <a:schemeClr val="accent1"/>
+          </a:effectRef>
+          <a:fontRef idx="minor">
+            <a:schemeClr val="lt1"/>
+          </a:fontRef>
+        </p:style>
+        <p:txBody>
+          <a:bodyPr rtlCol="0" anchor="ctr"/>
+          <a:lstStyle/>
+          <a:p>
+            <a:pPr algn="ctr"/>
+          </a:p>
+        </p:txBody>
+      </p:sp>
+      <p:sp>
+        <p:nvSpPr>
+          <p:cNvPr id="8" name="TextBox 7"/>
           <p:cNvSpPr txBox="1"/>
           <p:nvPr/>
         </p:nvSpPr>
         <p:spPr>
           <a:xfrm>
-            <a:off x="822960" y="1920240"/>
+            <a:off x="822960" y="1965960"/>
             <a:ext cx="4983480" cy="4206240"/>
           </a:xfrm>
           <a:prstGeom prst="rect">
@@ -10857,17 +12119,17 @@
           <a:p>
             <a:pPr>
               <a:spcAft>
-                <a:spcPts val="1000"/>
+                <a:spcPts val="1100"/>
               </a:spcAft>
             </a:pPr>
             <a:r>
               <a:rPr sz="1600" b="1" i="0">
                 <a:solidFill>
-                  <a:srgbClr val="2E3A80"/>
-                </a:solidFill>
-                <a:latin typeface="Montserrat"/>
-              </a:rPr>
-              <a:t>•  </a:t>
+                  <a:srgbClr val="E8801A"/>
+                </a:solidFill>
+                <a:latin typeface="Montserrat"/>
+              </a:rPr>
+              <a:t>▸  </a:t>
             </a:r>
             <a:r>
               <a:rPr sz="1600" b="0" i="0">
@@ -10876,23 +12138,23 @@
                 </a:solidFill>
                 <a:latin typeface="Montserrat"/>
               </a:rPr>
-              <a:t>Exterior: negro con 3 líneas amarillas</a:t>
+              <a:t>Press-fitting: interior y exterior hasta 5 bar</a:t>
             </a:r>
           </a:p>
           <a:p>
             <a:pPr>
               <a:spcAft>
-                <a:spcPts val="1000"/>
+                <a:spcPts val="1100"/>
               </a:spcAft>
             </a:pPr>
             <a:r>
               <a:rPr sz="1600" b="1" i="0">
                 <a:solidFill>
-                  <a:srgbClr val="2E3A80"/>
-                </a:solidFill>
-                <a:latin typeface="Montserrat"/>
-              </a:rPr>
-              <a:t>•  </a:t>
+                  <a:srgbClr val="E8801A"/>
+                </a:solidFill>
+                <a:latin typeface="Montserrat"/>
+              </a:rPr>
+              <a:t>▸  </a:t>
             </a:r>
             <a:r>
               <a:rPr sz="1600" b="0" i="0">
@@ -10901,23 +12163,23 @@
                 </a:solidFill>
                 <a:latin typeface="Montserrat"/>
               </a:rPr>
-              <a:t>Interior: normalmente amarillo</a:t>
+              <a:t>Sustituye a la soldadura fuerte</a:t>
             </a:r>
           </a:p>
           <a:p>
             <a:pPr>
               <a:spcAft>
-                <a:spcPts val="1000"/>
+                <a:spcPts val="1100"/>
               </a:spcAft>
             </a:pPr>
             <a:r>
               <a:rPr sz="1600" b="1" i="0">
                 <a:solidFill>
-                  <a:srgbClr val="2E3A80"/>
-                </a:solidFill>
-                <a:latin typeface="Montserrat"/>
-              </a:rPr>
-              <a:t>•  </a:t>
+                  <a:srgbClr val="E8801A"/>
+                </a:solidFill>
+                <a:latin typeface="Montserrat"/>
+              </a:rPr>
+              <a:t>▸  </a:t>
             </a:r>
             <a:r>
               <a:rPr sz="1600" b="0" i="0">
@@ -10926,23 +12188,23 @@
                 </a:solidFill>
                 <a:latin typeface="Montserrat"/>
               </a:rPr>
-              <a:t>Resistente a los rayos UV en exterior</a:t>
+              <a:t>Inox con cobre: manguito CuNi</a:t>
             </a:r>
           </a:p>
           <a:p>
             <a:pPr>
               <a:spcAft>
-                <a:spcPts val="1000"/>
+                <a:spcPts val="1100"/>
               </a:spcAft>
             </a:pPr>
             <a:r>
               <a:rPr sz="1600" b="1" i="0">
                 <a:solidFill>
-                  <a:srgbClr val="2E3A80"/>
-                </a:solidFill>
-                <a:latin typeface="Montserrat"/>
-              </a:rPr>
-              <a:t>•  </a:t>
+                  <a:srgbClr val="E8801A"/>
+                </a:solidFill>
+                <a:latin typeface="Montserrat"/>
+              </a:rPr>
+              <a:t>▸  </a:t>
             </a:r>
             <a:r>
               <a:rPr sz="1600" b="0" i="0">
@@ -10951,14 +12213,14 @@
                 </a:solidFill>
                 <a:latin typeface="Montserrat"/>
               </a:rPr>
-              <a:t>Si se pinta: testigos de gas visibles</a:t>
-            </a:r>
-          </a:p>
-        </p:txBody>
-      </p:sp>
-      <p:sp>
-        <p:nvSpPr>
-          <p:cNvPr id="8" name="imgph" descr="IMGQ:yellow multilayer gas pipe"/>
+              <a:t>Inox de serie 2, mismo diámetro</a:t>
+            </a:r>
+          </a:p>
+        </p:txBody>
+      </p:sp>
+      <p:sp>
+        <p:nvSpPr>
+          <p:cNvPr id="9" name="imgph" descr="IMGQ:press fitting pipe connection tool"/>
           <p:cNvSpPr/>
           <p:nvPr/>
         </p:nvSpPr>
@@ -11004,7 +12266,7 @@
       </p:sp>
       <p:sp>
         <p:nvSpPr>
-          <p:cNvPr id="9" name="TextBox 8"/>
+          <p:cNvPr id="10" name="TextBox 9"/>
           <p:cNvSpPr txBox="1"/>
           <p:nvPr/>
         </p:nvSpPr>
@@ -11044,7 +12306,7 @@
                 </a:solidFill>
                 <a:latin typeface="Montserrat"/>
               </a:rPr>
-              <a:t>yellow multilayer gas pipe</a:t>
+              <a:t>press fitting pipe connection tool</a:t>
             </a:r>
           </a:p>
         </p:txBody>

--- a/Curso Gas B/17 - Gas a la primera (guia practica NEDGIA)/17 - Gas a la primera (guia practica NEDGIA) - Vídeo 2.pptx
+++ b/Curso Gas B/17 - Gas a la primera (guia practica NEDGIA)/17 - Gas a la primera (guia practica NEDGIA) - Vídeo 2.pptx
@@ -904,12 +904,12 @@
           <a:lstStyle/>
           <a:p>
             <a:r>
-              <a:t>N1: Juntas un tubo de inoxidable con uno de cobre. Si no eliges bien la unión, aparece corrosión. ¿Qué manguito usas?</a:t>
-            </a:r>
-          </a:p>
-          <a:p>
-            <a:r>
-              <a:t>N2: Es un metal intermedio que hace de árbitro entre los dos; piensa en cobre más níquel.</a:t>
+              <a:t>N1: Juntas un tubo de acero inoxidable con uno de cobre; si no eliges bien la unión, aparece corrosión. La pregunta: ¿qué manguito se emplea para esa unión? Opción A, de cuproníquel, es decir cobre-níquel. Opción B, de cobre. Opción C, de acero inoxidable. Opción D, de latón. Piensa cuál evita que se coman la unión.</a:t>
+            </a:r>
+          </a:p>
+          <a:p>
+            <a:r>
+              <a:t>N2: Pista: es un metal intermedio que hace de árbitro entre los dos; cobre más níquel.</a:t>
             </a:r>
           </a:p>
         </p:txBody>
@@ -979,12 +979,12 @@
           <a:lstStyle/>
           <a:p>
             <a:r>
-              <a:t>N1: ¿Por qué el de cuproníquel?</a:t>
-            </a:r>
-          </a:p>
-          <a:p>
-            <a:r>
-              <a:t>N2: Porque dos metales distintos con humedad forman una pila que se come la unión, la corrosión galvánica. El cuproníquel media entre ambos y la evita. Regla: iguales con su mismo metal, inox con cobre, con cuproníquel.</a:t>
+              <a:t>N2: La respuesta correcta es la opción A: el manguito de cuproníquel. Cuando juntas dos metales distintos y hay humedad, se forma una pila diminuta que se va comiendo la unión: es la corrosión galvánica. El cuproníquel media entre el inoxidable y el cobre y la frena. El truco: iguales, con su mismo metal, inox con inox y cobre con cobre; distintos, inox con cobre, con manguito de cuproníquel.</a:t>
+            </a:r>
+          </a:p>
+          <a:p>
+            <a:r>
+              <a:t>N1: Cuproníquel, el árbitro entre los dos metales.</a:t>
             </a:r>
           </a:p>
         </p:txBody>
@@ -1729,12 +1729,12 @@
           <a:lstStyle/>
           <a:p>
             <a:r>
-              <a:t>N1: Vamos con la escalera de tiempos. Para la presión más alta de la tabla, de dos a cinco bar, y caudal bajo, ¿cuánto tiempo mantienes la prueba?</a:t>
-            </a:r>
-          </a:p>
-          <a:p>
-            <a:r>
-              <a:t>N2: A más presión, más tiempo; es el escalón más alto de todos.</a:t>
+              <a:t>N1: Vamos con la escalera de tiempos de la prueba de estanqueidad. Para la presión más alta de la tabla, una eme o pe de dos a cinco bar, y caudal bajo, de hasta ciento cincuenta metros cúbicos hora, la pregunta: ¿cuánto tiempo mantienes la prueba? Opción A, sesenta minutos. Opción B, treinta minutos. Opción C, quince minutos. Opción D, seis horas. Piénsalo.</a:t>
+            </a:r>
+          </a:p>
+          <a:p>
+            <a:r>
+              <a:t>N2: Pista: a más presión, más tiempo; es el escalón más alto de todos.</a:t>
             </a:r>
           </a:p>
         </p:txBody>
@@ -1804,12 +1804,12 @@
           <a:lstStyle/>
           <a:p>
             <a:r>
-              <a:t>N1: ¿Por qué sesenta minutos?</a:t>
-            </a:r>
-          </a:p>
-          <a:p>
-            <a:r>
-              <a:t>N2: Porque es el tramo de mayor presión, y cuanta más presión, más tiempo de prueba para cazar una microfuga. La escalera base es sesenta, treinta, treinta y quince minutos de más a menos presión; y los caudales grandes se van a seis o veinticuatro horas con registro.</a:t>
+              <a:t>N2: La respuesta correcta es la opción A: sesenta minutos. Es el tramo de mayor presión de la tabla, y cuanta más presión, más tiempo de prueba para cazar una microfuga. El truco de la escalera base, de más a menos presión, es sesenta, treinta, treinta y quince minutos. Cuidado con la opción D, seis horas: esa es para caudales grandes, de más de ciento cincuenta metros cúbicos hora, y con registro de presión y temperatura; aquí el caudal es bajo.</a:t>
+            </a:r>
+          </a:p>
+          <a:p>
+            <a:r>
+              <a:t>N1: Sesenta minutos, el escalón más alto.</a:t>
             </a:r>
           </a:p>
         </p:txBody>
@@ -2470,12 +2470,12 @@
           <a:lstStyle/>
           <a:p>
             <a:r>
-              <a:t>N1: La frontera entre soldadura blanda y fuerte es una cifra pequeña de presión. ¿Cuál es?</a:t>
-            </a:r>
-          </a:p>
-          <a:p>
-            <a:r>
-              <a:t>N2: Es la misma cifra que separa la baja presión del resto; piensa en centésimas de bar.</a:t>
+              <a:t>N1: Frontera clásica de examen, y cuidado que las cifras se parecen mucho de oído. La pregunta: ¿por encima de qué presión se exige soldadura fuerte en tubería de cobre? Opción A, cinco centésimas de bar. Opción B, cinco décimas de bar. Opción C, cinco bar. Opción D, cuatro décimas de bar. Párala y elige con calma.</a:t>
+            </a:r>
+          </a:p>
+          <a:p>
+            <a:r>
+              <a:t>N2: Pista: es la misma cifra que separa la baja presión del resto; piensa en centésimas de bar.</a:t>
             </a:r>
           </a:p>
         </p:txBody>
@@ -2545,12 +2545,12 @@
           <a:lstStyle/>
           <a:p>
             <a:r>
-              <a:t>N1: ¿Por qué esa presión?</a:t>
-            </a:r>
-          </a:p>
-          <a:p>
-            <a:r>
-              <a:t>N2: Porque la soldadura fuerte aguanta más temperatura y da más garantía, y por encima de cinco centésimas de bar te juegas más en cada unión. Y no olvides los dos sitios donde siempre pides fuerte aunque sea baja presión: aparcamientos cerrados y cocinas de tipo A que pasen de treinta kilovatios.</a:t>
+              <a:t>N2: La respuesta correcta es la opción A: cinco centésimas de bar. Hasta ahí vale soldadura blanda; por encima de cinco centésimas de bar, soldadura fuerte, porque aguanta más temperatura y da más garantía cuando te juegas más en cada unión. El truco para no caer en las opciones parecidas: la frontera son cinco centésimas, no cinco décimas ni cinco bar. Y no olvides los dos sitios donde siempre pides fuerte aunque sea baja presión: aparcamientos cerrados y cocinas de tipo A que pasen de treinta kilovatios.</a:t>
+            </a:r>
+          </a:p>
+          <a:p>
+            <a:r>
+              <a:t>N1: Cinco centésimas de bar, esa es la raya.</a:t>
             </a:r>
           </a:p>
         </p:txBody>
